--- a/docs/presentation/SIH26002_NER_Logistics_Submission6.pptx
+++ b/docs/presentation/SIH26002_NER_Logistics_Submission6.pptx
@@ -644,55 +644,48 @@
           <a:lstStyle/>
           <a:p>
             <a:r>
-              <a:t>Point at the map on the right first - say "this is a screenshot of the real</a:t>
-            </a:r>
-          </a:p>
-          <a:p>
-            <a:r>
-              <a:t>application, not a drawing" - then walk the three pointers on the left.</a:t>
+              <a:t>Point at the map on the right first and say plainly: this is a screenshot</a:t>
+            </a:r>
+          </a:p>
+          <a:p>
+            <a:r>
+              <a:t>of our own application, not an illustration. Then walk the three points on</a:t>
+            </a:r>
+          </a:p>
+          <a:p>
+            <a:r>
+              <a:t>the left in order.</a:t>
             </a:r>
           </a:p>
           <a:p/>
           <a:p>
             <a:r>
-              <a:t>01: one platform answers two questions - the best way to move freight, and</a:t>
-            </a:r>
-          </a:p>
-          <a:p>
-            <a:r>
-              <a:t>which villages are cut off.</a:t>
-            </a:r>
-          </a:p>
-          <a:p/>
-          <a:p>
-            <a:r>
-              <a:t>02: it prices the monsoon in rupees and hours instead of a warning label, and</a:t>
-            </a:r>
-          </a:p>
-          <a:p>
-            <a:r>
-              <a:t>names which villages are cut off rather than leaving it vague.</a:t>
-            </a:r>
-          </a:p>
-          <a:p/>
-          <a:p>
-            <a:r>
-              <a:t>03: the one line to make sure lands - we separate "this road may close</a:t>
-            </a:r>
-          </a:p>
-          <a:p>
-            <a:r>
-              <a:t>sometime this month" from "this trip will be stopped." Treating those as the</a:t>
-            </a:r>
-          </a:p>
-          <a:p>
-            <a:r>
-              <a:t>same number is the standard mistake, and it prices every hill road as</a:t>
-            </a:r>
-          </a:p>
-          <a:p>
-            <a:r>
-              <a:t>unusable instead of merely expensive.</a:t>
+              <a:t>Point one is what we built. Point two is why it matters - we turn a guess</a:t>
+            </a:r>
+          </a:p>
+          <a:p>
+            <a:r>
+              <a:t>about the monsoon into an actual number before the truck leaves. Point three</a:t>
+            </a:r>
+          </a:p>
+          <a:p>
+            <a:r>
+              <a:t>is the one thing worth slowing down for: we separate "this road might close</a:t>
+            </a:r>
+          </a:p>
+          <a:p>
+            <a:r>
+              <a:t>this month" from "this specific trip will be stopped by it." Treating those</a:t>
+            </a:r>
+          </a:p>
+          <a:p>
+            <a:r>
+              <a:t>as the same thing is the usual mistake, and it makes every hill road look</a:t>
+            </a:r>
+          </a:p>
+          <a:p>
+            <a:r>
+              <a:t>unusable instead of just more expensive.</a:t>
             </a:r>
           </a:p>
         </p:txBody>
@@ -806,38 +799,38 @@
           <a:lstStyle/>
           <a:p>
             <a:r>
-              <a:t>Top row: four technology groups, ten seconds each, no need to read every</a:t>
-            </a:r>
-          </a:p>
-          <a:p>
-            <a:r>
-              <a:t>word - point and move on.</a:t>
+              <a:t>Top: four groups of tools, ten seconds each - point and move on, no need</a:t>
+            </a:r>
+          </a:p>
+          <a:p>
+            <a:r>
+              <a:t>to read every word out loud.</a:t>
             </a:r>
           </a:p>
           <a:p/>
           <a:p>
             <a:r>
-              <a:t>Bottom: the same five-box flow chart, left to right. Open data comes in,</a:t>
-            </a:r>
-          </a:p>
-          <a:p>
-            <a:r>
-              <a:t>gets built into a scored network offline, an engine turns that into risk and</a:t>
-            </a:r>
-          </a:p>
-          <a:p>
-            <a:r>
-              <a:t>cost, four features answer real questions, and one process serves all of it.</a:t>
-            </a:r>
-          </a:p>
-          <a:p>
-            <a:r>
-              <a:t>Say "no build step, no CDN" when you reach box five - that is why the demo</a:t>
-            </a:r>
-          </a:p>
-          <a:p>
-            <a:r>
-              <a:t>still works if the venue's wifi blocks something.</a:t>
+              <a:t>Bottom: the same idea as a flow chart. Data comes in, we build a scored</a:t>
+            </a:r>
+          </a:p>
+          <a:p>
+            <a:r>
+              <a:t>network from it offline, an engine turns that into risk and cost, four</a:t>
+            </a:r>
+          </a:p>
+          <a:p>
+            <a:r>
+              <a:t>features answer real questions, and one process serves all of it. When you</a:t>
+            </a:r>
+          </a:p>
+          <a:p>
+            <a:r>
+              <a:t>reach box five, mention there is no build step and no CDN - that is why the</a:t>
+            </a:r>
+          </a:p>
+          <a:p>
+            <a:r>
+              <a:t>demo still works even if the venue's wifi blocks something.</a:t>
             </a:r>
           </a:p>
         </p:txBody>
@@ -951,43 +944,43 @@
           <a:lstStyle/>
           <a:p>
             <a:r>
-              <a:t>Left: three numbers that prove it already exists - 25,360 km built, ₹0</a:t>
-            </a:r>
-          </a:p>
-          <a:p>
-            <a:r>
-              <a:t>recurring cost, 261 tests passing. Don't linger, just land the three.</a:t>
+              <a:t>Left: three numbers that show this already exists - 25,360 km built, zero</a:t>
+            </a:r>
+          </a:p>
+          <a:p>
+            <a:r>
+              <a:t>rupees spent on data, 261 tests passing. Say them and move on.</a:t>
             </a:r>
           </a:p>
           <a:p/>
           <a:p>
             <a:r>
-              <a:t>Right: this is the slide judges probe hardest, and it is a table on purpose -</a:t>
-            </a:r>
-          </a:p>
-          <a:p>
-            <a:r>
-              <a:t>every challenge sits directly across from its answer. The strongest pairing</a:t>
-            </a:r>
-          </a:p>
-          <a:p>
-            <a:r>
-              <a:t>is the first one: India has no live road-closure feed anywhere, so we predict</a:t>
-            </a:r>
-          </a:p>
-          <a:p>
-            <a:r>
-              <a:t>from rainfall and terrain instead, and the app is built to take driver reports</a:t>
-            </a:r>
-          </a:p>
-          <a:p>
-            <a:r>
-              <a:t>later and learn from them. Say that one plainly - it is a real gap and</a:t>
-            </a:r>
-          </a:p>
-          <a:p>
-            <a:r>
-              <a:t>naming it first is stronger than waiting to be asked.</a:t>
+              <a:t>Right is the table judges will look at closest. Every challenge sits right</a:t>
+            </a:r>
+          </a:p>
+          <a:p>
+            <a:r>
+              <a:t>across from what we are doing about it. Lead with the first row: India has</a:t>
+            </a:r>
+          </a:p>
+          <a:p>
+            <a:r>
+              <a:t>no live road-closure feed anywhere, so we predict from rainfall and terrain</a:t>
+            </a:r>
+          </a:p>
+          <a:p>
+            <a:r>
+              <a:t>instead, and we are designing the app to learn from driver reports later.</a:t>
+            </a:r>
+          </a:p>
+          <a:p>
+            <a:r>
+              <a:t>Naming that gap yourself, before anyone asks, is stronger than waiting to be</a:t>
+            </a:r>
+          </a:p>
+          <a:p>
+            <a:r>
+              <a:t>caught out.</a:t>
             </a:r>
           </a:p>
         </p:txBody>
@@ -1160,38 +1153,43 @@
           <a:lstStyle/>
           <a:p>
             <a:r>
-              <a:t>Three audiences, three numbers. Billbari - 1.3 days to a market in the</a:t>
-            </a:r>
-          </a:p>
-          <a:p>
-            <a:r>
-              <a:t>monsoon - is the one to read out loud, it is the most human. For a policy</a:t>
-            </a:r>
-          </a:p>
-          <a:p>
-            <a:r>
-              <a:t>panel, use the MDoNER card instead: 1,309 of 4,033 major roads at severe risk</a:t>
-            </a:r>
-          </a:p>
-          <a:p>
-            <a:r>
-              <a:t>in July, and on 1,055 of them the cause is flooding, not landslides - so</a:t>
-            </a:r>
-          </a:p>
-          <a:p>
-            <a:r>
-              <a:t>spending on slope stabilisation would fix the wrong roads on those.</a:t>
+              <a:t>Three audiences, three examples. Read the Billbari line out loud - it is</a:t>
+            </a:r>
+          </a:p>
+          <a:p>
+            <a:r>
+              <a:t>the most human one, a farmer knowing it takes 1.3 days to reach a market in</a:t>
+            </a:r>
+          </a:p>
+          <a:p>
+            <a:r>
+              <a:t>the monsoon changes what they plant. For a policy-focused panel, use the</a:t>
+            </a:r>
+          </a:p>
+          <a:p>
+            <a:r>
+              <a:t>MDoNER card instead: 1,309 of 4,033 major roads at serious risk in July, and</a:t>
+            </a:r>
+          </a:p>
+          <a:p>
+            <a:r>
+              <a:t>on 1,055 of them the real cause is flooding, not landslides - so money gets</a:t>
+            </a:r>
+          </a:p>
+          <a:p>
+            <a:r>
+              <a:t>spent fixing the right problem.</a:t>
             </a:r>
           </a:p>
           <a:p/>
           <a:p>
             <a:r>
-              <a:t>Bottom row: social, economic, environmental, one line each - don't read all</a:t>
-            </a:r>
-          </a:p>
-          <a:p>
-            <a:r>
-              <a:t>three unless asked, they are there to show completeness.</a:t>
+              <a:t>Bottom row is social, economic, environmental, one line each - only read all</a:t>
+            </a:r>
+          </a:p>
+          <a:p>
+            <a:r>
+              <a:t>three if asked, they are there to show we thought about it.</a:t>
             </a:r>
           </a:p>
         </p:txBody>
@@ -1364,32 +1362,32 @@
           <a:lstStyle/>
           <a:p>
             <a:r>
-              <a:t>Keep this slide short - it is the credibility slide, not the argument.</a:t>
-            </a:r>
-          </a:p>
-          <a:p>
-            <a:r>
-              <a:t>Everything used here is open and free, so the platform has nothing to</a:t>
-            </a:r>
-          </a:p>
-          <a:p>
-            <a:r>
-              <a:t>license before it can be deployed. Mention that the landslide catalogue</a:t>
-            </a:r>
-          </a:p>
-          <a:p>
-            <a:r>
-              <a:t>download is still pending rather than implying it is loaded - if a judge</a:t>
-            </a:r>
-          </a:p>
-          <a:p>
-            <a:r>
-              <a:t>checks, honesty here is worth more than a clean-looking list. Close by</a:t>
-            </a:r>
-          </a:p>
-          <a:p>
-            <a:r>
-              <a:t>pointing at the GitHub link: the code and tests are public.</a:t>
+              <a:t>Keep this one short. Everything we used is open and free, so there is</a:t>
+            </a:r>
+          </a:p>
+          <a:p>
+            <a:r>
+              <a:t>nothing to license before this can be deployed anywhere. Be upfront that the</a:t>
+            </a:r>
+          </a:p>
+          <a:p>
+            <a:r>
+              <a:t>landslide catalogue download is still pending rather than implying it is</a:t>
+            </a:r>
+          </a:p>
+          <a:p>
+            <a:r>
+              <a:t>already loaded - if someone checks, honesty here counts for more than</a:t>
+            </a:r>
+          </a:p>
+          <a:p>
+            <a:r>
+              <a:t>looking complete. Close by pointing at the GitHub link: the code and tests</a:t>
+            </a:r>
+          </a:p>
+          <a:p>
+            <a:r>
+              <a:t>are public.</a:t>
             </a:r>
           </a:p>
         </p:txBody>
@@ -1542,32 +1540,32 @@
           <a:lstStyle/>
           <a:p>
             <a:r>
-              <a:t>Say the geography before the software. The eight North Eastern states reach</a:t>
-            </a:r>
-          </a:p>
-          <a:p>
-            <a:r>
-              <a:t>the rest of India through one 22 km strip near Siliguri. Highways are mostly</a:t>
-            </a:r>
-          </a:p>
-          <a:p>
-            <a:r>
-              <a:t>single lane through hills that slide, Assam floods every year, and for four</a:t>
-            </a:r>
-          </a:p>
-          <a:p>
-            <a:r>
-              <a:t>months the monsoon shuts the roads the other eight months depend on. MDoNER</a:t>
-            </a:r>
-          </a:p>
-          <a:p>
-            <a:r>
-              <a:t>asked for a platform that plans freight across all of that and shows which</a:t>
-            </a:r>
-          </a:p>
-          <a:p>
-            <a:r>
-              <a:t>places are cut off. This deck is that platform, already built and running.</a:t>
+              <a:t>Start with the place, not the software. The eight North Eastern states</a:t>
+            </a:r>
+          </a:p>
+          <a:p>
+            <a:r>
+              <a:t>reach the rest of India through one narrow strip of land near Siliguri.</a:t>
+            </a:r>
+          </a:p>
+          <a:p>
+            <a:r>
+              <a:t>Highways are mostly single lane through hills that slide, Assam floods every</a:t>
+            </a:r>
+          </a:p>
+          <a:p>
+            <a:r>
+              <a:t>year, and for four months the monsoon shuts the roads the other eight months</a:t>
+            </a:r>
+          </a:p>
+          <a:p>
+            <a:r>
+              <a:t>depend on. That is the problem we are solving, and what follows is already</a:t>
+            </a:r>
+          </a:p>
+          <a:p>
+            <a:r>
+              <a:t>built and running, not a plan.</a:t>
             </a:r>
           </a:p>
         </p:txBody>
@@ -5879,14 +5877,14 @@
           <a:p>
             <a:pPr>
               <a:lnSpc>
-                <a:spcPct val="112000"/>
+                <a:spcPct val="115000"/>
               </a:lnSpc>
               <a:spcAft>
-                <a:spcPts val="900"/>
+                <a:spcPts val="1000"/>
               </a:spcAft>
             </a:pPr>
             <a:r>
-              <a:rPr sz="1300" b="1">
+              <a:rPr sz="1350" b="1">
                 <a:solidFill>
                   <a:srgbClr val="1F4E79"/>
                 </a:solidFill>
@@ -5895,7 +5893,7 @@
               <a:t>Problem Statement ID  </a:t>
             </a:r>
             <a:r>
-              <a:rPr sz="1300" b="0">
+              <a:rPr sz="1350" b="0">
                 <a:solidFill>
                   <a:srgbClr val="1A1A1A"/>
                 </a:solidFill>
@@ -5908,14 +5906,14 @@
           <a:p>
             <a:pPr>
               <a:lnSpc>
-                <a:spcPct val="112000"/>
+                <a:spcPct val="115000"/>
               </a:lnSpc>
               <a:spcAft>
-                <a:spcPts val="900"/>
+                <a:spcPts val="1000"/>
               </a:spcAft>
             </a:pPr>
             <a:r>
-              <a:rPr sz="1300" b="1">
+              <a:rPr sz="1350" b="1">
                 <a:solidFill>
                   <a:srgbClr val="1F4E79"/>
                 </a:solidFill>
@@ -5924,7 +5922,7 @@
               <a:t>Problem Statement  </a:t>
             </a:r>
             <a:r>
-              <a:rPr sz="1300" b="0">
+              <a:rPr sz="1350" b="0">
                 <a:solidFill>
                   <a:srgbClr val="1A1A1A"/>
                 </a:solidFill>
@@ -5936,14 +5934,14 @@
           <a:p>
             <a:pPr>
               <a:lnSpc>
-                <a:spcPct val="112000"/>
+                <a:spcPct val="115000"/>
               </a:lnSpc>
               <a:spcAft>
-                <a:spcPts val="900"/>
+                <a:spcPts val="1000"/>
               </a:spcAft>
             </a:pPr>
             <a:r>
-              <a:rPr sz="1300" b="1">
+              <a:rPr sz="1350" b="1">
                 <a:solidFill>
                   <a:srgbClr val="1F4E79"/>
                 </a:solidFill>
@@ -5952,7 +5950,7 @@
               <a:t>Theme  </a:t>
             </a:r>
             <a:r>
-              <a:rPr sz="1300" b="0">
+              <a:rPr sz="1350" b="0">
                 <a:solidFill>
                   <a:srgbClr val="1A1A1A"/>
                 </a:solidFill>
@@ -5964,14 +5962,14 @@
           <a:p>
             <a:pPr>
               <a:lnSpc>
-                <a:spcPct val="112000"/>
+                <a:spcPct val="115000"/>
               </a:lnSpc>
               <a:spcAft>
-                <a:spcPts val="900"/>
+                <a:spcPts val="1000"/>
               </a:spcAft>
             </a:pPr>
             <a:r>
-              <a:rPr sz="1300" b="1">
+              <a:rPr sz="1350" b="1">
                 <a:solidFill>
                   <a:srgbClr val="1F4E79"/>
                 </a:solidFill>
@@ -5980,7 +5978,7 @@
               <a:t>PS Category  </a:t>
             </a:r>
             <a:r>
-              <a:rPr sz="1300" b="0">
+              <a:rPr sz="1350" b="0">
                 <a:solidFill>
                   <a:srgbClr val="1A1A1A"/>
                 </a:solidFill>
@@ -5992,14 +5990,14 @@
           <a:p>
             <a:pPr>
               <a:lnSpc>
-                <a:spcPct val="112000"/>
+                <a:spcPct val="115000"/>
               </a:lnSpc>
               <a:spcAft>
-                <a:spcPts val="900"/>
+                <a:spcPts val="1000"/>
               </a:spcAft>
             </a:pPr>
             <a:r>
-              <a:rPr sz="1300" b="1">
+              <a:rPr sz="1350" b="1">
                 <a:solidFill>
                   <a:srgbClr val="1F4E79"/>
                 </a:solidFill>
@@ -6008,7 +6006,7 @@
               <a:t>Team ID  </a:t>
             </a:r>
             <a:r>
-              <a:rPr sz="1300" b="0">
+              <a:rPr sz="1350" b="0">
                 <a:solidFill>
                   <a:srgbClr val="1A1A1A"/>
                 </a:solidFill>
@@ -6020,14 +6018,14 @@
           <a:p>
             <a:pPr>
               <a:lnSpc>
-                <a:spcPct val="112000"/>
+                <a:spcPct val="115000"/>
               </a:lnSpc>
               <a:spcAft>
-                <a:spcPts val="900"/>
+                <a:spcPts val="1000"/>
               </a:spcAft>
             </a:pPr>
             <a:r>
-              <a:rPr sz="1300" b="1">
+              <a:rPr sz="1350" b="1">
                 <a:solidFill>
                   <a:srgbClr val="1F4E79"/>
                 </a:solidFill>
@@ -6036,7 +6034,7 @@
               <a:t>Team Name  </a:t>
             </a:r>
             <a:r>
-              <a:rPr sz="1300" b="0">
+              <a:rPr sz="1350" b="0">
                 <a:solidFill>
                   <a:srgbClr val="1A1A1A"/>
                 </a:solidFill>
@@ -6189,13 +6187,13 @@
               </a:rPr>
             </a:br>
             <a:r>
-              <a:rPr sz="2500" b="1">
+              <a:rPr sz="2200" b="1">
                 <a:solidFill>
                   <a:srgbClr val="1A1A1A"/>
                 </a:solidFill>
                 <a:latin typeface="Calibri"/>
               </a:rPr>
-              <a:t>Route the North East by Risk, Not by Distance</a:t>
+              <a:t>AI-Based Route Planning and Accessibility Mapping for the North East</a:t>
             </a:r>
           </a:p>
         </p:txBody>
@@ -6361,7 +6359,7 @@
         <p:spPr>
           <a:xfrm>
             <a:off x="502920" y="1060704"/>
-            <a:ext cx="11155680" cy="237744"/>
+            <a:ext cx="11155680" cy="274320"/>
           </a:xfrm>
           <a:prstGeom prst="rect">
             <a:avLst/>
@@ -6376,20 +6374,20 @@
           <a:p>
             <a:pPr algn="l">
               <a:lnSpc>
-                <a:spcPct val="112000"/>
+                <a:spcPct val="115000"/>
               </a:lnSpc>
               <a:spcAft>
                 <a:spcPts val="0"/>
               </a:spcAft>
             </a:pPr>
             <a:r>
-              <a:rPr sz="1100" b="0" i="0">
+              <a:rPr sz="1150" b="0" i="0">
                 <a:solidFill>
                   <a:srgbClr val="1F4E79"/>
                 </a:solidFill>
                 <a:latin typeface="Calibri"/>
               </a:rPr>
-              <a:t>Proposed Solution (Idea / Solution / Prototype)</a:t>
+              <a:t>Proposed Solution (Describe your Idea/Solution/Prototype)</a:t>
             </a:r>
           </a:p>
         </p:txBody>
@@ -6402,8 +6400,8 @@
         </p:nvSpPr>
         <p:spPr>
           <a:xfrm>
-            <a:off x="502920" y="1517904"/>
-            <a:ext cx="310896" cy="274320"/>
+            <a:off x="502920" y="1499616"/>
+            <a:ext cx="365760" cy="329184"/>
           </a:xfrm>
           <a:prstGeom prst="rect">
             <a:avLst/>
@@ -6444,8 +6442,8 @@
         </p:nvSpPr>
         <p:spPr>
           <a:xfrm>
-            <a:off x="502920" y="1517904"/>
-            <a:ext cx="310896" cy="274320"/>
+            <a:off x="502920" y="1499616"/>
+            <a:ext cx="365760" cy="329184"/>
           </a:xfrm>
           <a:prstGeom prst="rect">
             <a:avLst/>
@@ -6467,7 +6465,7 @@
               </a:spcAft>
             </a:pPr>
             <a:r>
-              <a:rPr sz="950" b="1" i="0">
+              <a:rPr sz="1100" b="1" i="0">
                 <a:solidFill>
                   <a:srgbClr val="FFFFFF"/>
                 </a:solidFill>
@@ -6486,8 +6484,8 @@
         </p:nvSpPr>
         <p:spPr>
           <a:xfrm>
-            <a:off x="923544" y="1499616"/>
-            <a:ext cx="6483096" cy="310896"/>
+            <a:off x="978408" y="1499616"/>
+            <a:ext cx="6428231" cy="329184"/>
           </a:xfrm>
           <a:prstGeom prst="rect">
             <a:avLst/>
@@ -6509,7 +6507,7 @@
               </a:spcAft>
             </a:pPr>
             <a:r>
-              <a:rPr sz="1200" b="1" i="0">
+              <a:rPr sz="1300" b="1" i="0">
                 <a:solidFill>
                   <a:srgbClr val="1A1A1A"/>
                 </a:solidFill>
@@ -6528,8 +6526,8 @@
         </p:nvSpPr>
         <p:spPr>
           <a:xfrm>
-            <a:off x="923544" y="1865376"/>
-            <a:ext cx="6483096" cy="777240"/>
+            <a:off x="978408" y="1883664"/>
+            <a:ext cx="6428231" cy="868680"/>
           </a:xfrm>
           <a:prstGeom prst="rect">
             <a:avLst/>
@@ -6544,39 +6542,39 @@
           <a:p>
             <a:pPr algn="l">
               <a:lnSpc>
-                <a:spcPct val="115000"/>
+                <a:spcPct val="118000"/>
               </a:lnSpc>
               <a:spcAft>
-                <a:spcPts val="800"/>
+                <a:spcPts val="900"/>
               </a:spcAft>
             </a:pPr>
             <a:r>
-              <a:rPr sz="1150" b="0" i="0">
+              <a:rPr sz="1250" b="0" i="0">
                 <a:solidFill>
                   <a:srgbClr val="1A1A1A"/>
                 </a:solidFill>
                 <a:latin typeface="Calibri"/>
               </a:rPr>
-              <a:t>–  One platform, two engines — plans multimodal freight routes and scores village accessibility, on one shared network.</a:t>
+              <a:t>-  We built one web application that does two things: it plans the best way to move a shipment across the North East, and it shows which villages are hard to reach.</a:t>
             </a:r>
           </a:p>
           <a:p>
             <a:pPr algn="l">
               <a:lnSpc>
-                <a:spcPct val="115000"/>
+                <a:spcPct val="118000"/>
               </a:lnSpc>
               <a:spcAft>
-                <a:spcPts val="800"/>
+                <a:spcPts val="900"/>
               </a:spcAft>
             </a:pPr>
             <a:r>
-              <a:rPr sz="1150" b="0" i="0">
+              <a:rPr sz="1250" b="0" i="0">
                 <a:solidFill>
                   <a:srgbClr val="1A1A1A"/>
                 </a:solidFill>
                 <a:latin typeface="Calibri"/>
               </a:rPr>
-              <a:t>–  Layers road, rail, waterway and air into one graph; every change of vehicle is charged real handling cost and time.</a:t>
+              <a:t>-  It treats road, rail, the Brahmaputra waterway and air as one connected network, so it can suggest part road and part rail when that works out cheaper or safer.</a:t>
             </a:r>
           </a:p>
         </p:txBody>
@@ -6589,8 +6587,8 @@
         </p:nvSpPr>
         <p:spPr>
           <a:xfrm>
-            <a:off x="502920" y="2798064"/>
-            <a:ext cx="310896" cy="274320"/>
+            <a:off x="502920" y="2889504"/>
+            <a:ext cx="365760" cy="329184"/>
           </a:xfrm>
           <a:prstGeom prst="rect">
             <a:avLst/>
@@ -6631,8 +6629,8 @@
         </p:nvSpPr>
         <p:spPr>
           <a:xfrm>
-            <a:off x="502920" y="2798064"/>
-            <a:ext cx="310896" cy="274320"/>
+            <a:off x="502920" y="2889504"/>
+            <a:ext cx="365760" cy="329184"/>
           </a:xfrm>
           <a:prstGeom prst="rect">
             <a:avLst/>
@@ -6654,7 +6652,7 @@
               </a:spcAft>
             </a:pPr>
             <a:r>
-              <a:rPr sz="950" b="1" i="0">
+              <a:rPr sz="1100" b="1" i="0">
                 <a:solidFill>
                   <a:srgbClr val="FFFFFF"/>
                 </a:solidFill>
@@ -6673,8 +6671,8 @@
         </p:nvSpPr>
         <p:spPr>
           <a:xfrm>
-            <a:off x="923544" y="2779776"/>
-            <a:ext cx="6483096" cy="310896"/>
+            <a:off x="978408" y="2889504"/>
+            <a:ext cx="6428231" cy="329184"/>
           </a:xfrm>
           <a:prstGeom prst="rect">
             <a:avLst/>
@@ -6696,7 +6694,7 @@
               </a:spcAft>
             </a:pPr>
             <a:r>
-              <a:rPr sz="1200" b="1" i="0">
+              <a:rPr sz="1300" b="1" i="0">
                 <a:solidFill>
                   <a:srgbClr val="1A1A1A"/>
                 </a:solidFill>
@@ -6715,8 +6713,8 @@
         </p:nvSpPr>
         <p:spPr>
           <a:xfrm>
-            <a:off x="923544" y="3145536"/>
-            <a:ext cx="6483096" cy="777240"/>
+            <a:off x="978408" y="3273552"/>
+            <a:ext cx="6428231" cy="868680"/>
           </a:xfrm>
           <a:prstGeom prst="rect">
             <a:avLst/>
@@ -6731,39 +6729,39 @@
           <a:p>
             <a:pPr algn="l">
               <a:lnSpc>
-                <a:spcPct val="115000"/>
+                <a:spcPct val="118000"/>
               </a:lnSpc>
               <a:spcAft>
-                <a:spcPts val="800"/>
+                <a:spcPts val="900"/>
               </a:spcAft>
             </a:pPr>
             <a:r>
-              <a:rPr sz="1150" b="0" i="0">
+              <a:rPr sz="1250" b="0" i="0">
                 <a:solidFill>
                   <a:srgbClr val="1A1A1A"/>
                 </a:solidFill>
                 <a:latin typeface="Calibri"/>
               </a:rPr>
-              <a:t>–  Turns “the monsoon might disrupt this” into a rupee-and-hour number a shipper can act on before dispatch.</a:t>
+              <a:t>-  Right now people plan routes off a map and guess how bad the monsoon will be. We turn that guess into a number - extra hours and rupees - before the truck leaves.</a:t>
             </a:r>
           </a:p>
           <a:p>
             <a:pPr algn="l">
               <a:lnSpc>
-                <a:spcPct val="115000"/>
+                <a:spcPct val="118000"/>
               </a:lnSpc>
               <a:spcAft>
-                <a:spcPts val="800"/>
+                <a:spcPts val="900"/>
               </a:spcAft>
             </a:pPr>
             <a:r>
-              <a:rPr sz="1150" b="0" i="0">
+              <a:rPr sz="1250" b="0" i="0">
                 <a:solidFill>
                   <a:srgbClr val="1A1A1A"/>
                 </a:solidFill>
                 <a:latin typeface="Calibri"/>
               </a:rPr>
-              <a:t>–  Names exactly which villages are cut off and by how much — so investment is targeted, not guessed.</a:t>
+              <a:t>-  We also rank villages by how many hours they actually need to reach a market or hospital, so it is clear which ones need help first.</a:t>
             </a:r>
           </a:p>
         </p:txBody>
@@ -6776,8 +6774,8 @@
         </p:nvSpPr>
         <p:spPr>
           <a:xfrm>
-            <a:off x="502920" y="4078224"/>
-            <a:ext cx="310896" cy="274320"/>
+            <a:off x="502920" y="4279392"/>
+            <a:ext cx="365760" cy="329184"/>
           </a:xfrm>
           <a:prstGeom prst="rect">
             <a:avLst/>
@@ -6818,8 +6816,8 @@
         </p:nvSpPr>
         <p:spPr>
           <a:xfrm>
-            <a:off x="502920" y="4078224"/>
-            <a:ext cx="310896" cy="274320"/>
+            <a:off x="502920" y="4279392"/>
+            <a:ext cx="365760" cy="329184"/>
           </a:xfrm>
           <a:prstGeom prst="rect">
             <a:avLst/>
@@ -6841,7 +6839,7 @@
               </a:spcAft>
             </a:pPr>
             <a:r>
-              <a:rPr sz="950" b="1" i="0">
+              <a:rPr sz="1100" b="1" i="0">
                 <a:solidFill>
                   <a:srgbClr val="FFFFFF"/>
                 </a:solidFill>
@@ -6860,8 +6858,8 @@
         </p:nvSpPr>
         <p:spPr>
           <a:xfrm>
-            <a:off x="923544" y="4059936"/>
-            <a:ext cx="6483096" cy="310896"/>
+            <a:off x="978408" y="4279392"/>
+            <a:ext cx="6428231" cy="329184"/>
           </a:xfrm>
           <a:prstGeom prst="rect">
             <a:avLst/>
@@ -6883,7 +6881,7 @@
               </a:spcAft>
             </a:pPr>
             <a:r>
-              <a:rPr sz="1200" b="1" i="0">
+              <a:rPr sz="1300" b="1" i="0">
                 <a:solidFill>
                   <a:srgbClr val="1A1A1A"/>
                 </a:solidFill>
@@ -6902,8 +6900,8 @@
         </p:nvSpPr>
         <p:spPr>
           <a:xfrm>
-            <a:off x="923544" y="4425696"/>
-            <a:ext cx="6483096" cy="1005840"/>
+            <a:off x="978408" y="4663440"/>
+            <a:ext cx="6428231" cy="1051560"/>
           </a:xfrm>
           <a:prstGeom prst="rect">
             <a:avLst/>
@@ -6918,39 +6916,39 @@
           <a:p>
             <a:pPr algn="l">
               <a:lnSpc>
-                <a:spcPct val="115000"/>
+                <a:spcPct val="118000"/>
               </a:lnSpc>
               <a:spcAft>
-                <a:spcPts val="800"/>
+                <a:spcPts val="900"/>
               </a:spcAft>
             </a:pPr>
             <a:r>
-              <a:rPr sz="1150" b="0" i="0">
+              <a:rPr sz="1250" b="0" i="0">
                 <a:solidFill>
                   <a:srgbClr val="1A1A1A"/>
                 </a:solidFill>
                 <a:latin typeface="Calibri"/>
               </a:rPr>
-              <a:t>–  Keeps “this road may close this month” separate from “this trip will meet it” — a hill route prices as expensive, not impossible.</a:t>
+              <a:t>-  Most tools say a road might be blocked this month and stop there. We also work out the chance a specific trip gets caught in it, so a hill route shows up as costly, not impossible.</a:t>
             </a:r>
           </a:p>
           <a:p>
             <a:pPr algn="l">
               <a:lnSpc>
-                <a:spcPct val="115000"/>
+                <a:spcPct val="118000"/>
               </a:lnSpc>
               <a:spcAft>
-                <a:spcPts val="800"/>
+                <a:spcPts val="900"/>
               </a:spcAft>
             </a:pPr>
             <a:r>
-              <a:rPr sz="1150" b="0" i="0">
+              <a:rPr sz="1250" b="0" i="0">
                 <a:solidFill>
                   <a:srgbClr val="1A1A1A"/>
                 </a:solidFill>
                 <a:latin typeface="Calibri"/>
               </a:rPr>
-              <a:t>–  Landslide and flood are scored as two independent hazards. Built and validated entirely on free, open data — ₹0 recurring cost.</a:t>
+              <a:t>-  Landslides and floods are scored separately, since they happen on different terrain in different seasons - and the whole thing runs on free data, so there is no cost to keep it running.</a:t>
             </a:r>
           </a:p>
         </p:txBody>
@@ -7029,8 +7027,8 @@
         </p:nvSpPr>
         <p:spPr>
           <a:xfrm>
-            <a:off x="7589520" y="4462272"/>
-            <a:ext cx="4096512" cy="411480"/>
+            <a:off x="7589520" y="4471416"/>
+            <a:ext cx="4096512" cy="502920"/>
           </a:xfrm>
           <a:prstGeom prst="rect">
             <a:avLst/>
@@ -7045,20 +7043,20 @@
           <a:p>
             <a:pPr algn="l">
               <a:lnSpc>
-                <a:spcPct val="110000"/>
+                <a:spcPct val="115000"/>
               </a:lnSpc>
               <a:spcAft>
                 <a:spcPts val="0"/>
               </a:spcAft>
             </a:pPr>
             <a:r>
-              <a:rPr sz="900" b="0" i="0">
-                <a:solidFill>
-                  <a:srgbClr val="8A8A8A"/>
+              <a:rPr sz="1050" b="0" i="0">
+                <a:solidFill>
+                  <a:srgbClr val="505050"/>
                 </a:solidFill>
                 <a:latin typeface="Calibri"/>
               </a:rPr>
-              <a:t>The whole network, live from the app — 7,181 road segments coloured by monsoon risk this month.</a:t>
+              <a:t>A real screenshot from our app: all 7,181 road segments we track, coloured by monsoon risk.</a:t>
             </a:r>
           </a:p>
         </p:txBody>
@@ -7071,8 +7069,8 @@
         </p:nvSpPr>
         <p:spPr>
           <a:xfrm>
-            <a:off x="7589520" y="5074920"/>
-            <a:ext cx="4096512" cy="1188720"/>
+            <a:off x="7589520" y="5212080"/>
+            <a:ext cx="4096512" cy="1097280"/>
           </a:xfrm>
           <a:prstGeom prst="rect">
             <a:avLst/>
@@ -7113,8 +7111,8 @@
         </p:nvSpPr>
         <p:spPr>
           <a:xfrm>
-            <a:off x="7772400" y="5193792"/>
-            <a:ext cx="3730752" cy="932688"/>
+            <a:off x="7772400" y="5330952"/>
+            <a:ext cx="3730752" cy="896112"/>
           </a:xfrm>
           <a:prstGeom prst="rect">
             <a:avLst/>
@@ -7129,77 +7127,77 @@
           <a:p>
             <a:pPr algn="l">
               <a:lnSpc>
-                <a:spcPct val="112000"/>
+                <a:spcPct val="115000"/>
               </a:lnSpc>
               <a:spcAft>
-                <a:spcPts val="400"/>
+                <a:spcPts val="500"/>
               </a:spcAft>
             </a:pPr>
             <a:r>
-              <a:rPr sz="1050" b="1" i="0">
+              <a:rPr sz="1100" b="1" i="0">
                 <a:solidFill>
                   <a:srgbClr val="1A1A1A"/>
                 </a:solidFill>
                 <a:latin typeface="Calibri"/>
               </a:rPr>
-              <a:t>At a glance</a:t>
+              <a:t>A few numbers that sum it up</a:t>
             </a:r>
           </a:p>
           <a:p>
             <a:pPr algn="l">
               <a:lnSpc>
-                <a:spcPct val="112000"/>
+                <a:spcPct val="115000"/>
               </a:lnSpc>
               <a:spcAft>
                 <a:spcPts val="300"/>
               </a:spcAft>
             </a:pPr>
             <a:r>
-              <a:rPr sz="1000" b="0" i="0">
-                <a:solidFill>
-                  <a:srgbClr val="5F5F5F"/>
+              <a:rPr sz="1050" b="0" i="0">
+                <a:solidFill>
+                  <a:srgbClr val="505050"/>
                 </a:solidFill>
                 <a:latin typeface="Calibri"/>
               </a:rPr>
-              <a:t>7,181 segments  ·  25,360 km scored</a:t>
+              <a:t>7,181 road segments  ·  25,360 km scored</a:t>
             </a:r>
           </a:p>
           <a:p>
             <a:pPr algn="l">
               <a:lnSpc>
-                <a:spcPct val="112000"/>
+                <a:spcPct val="115000"/>
               </a:lnSpc>
               <a:spcAft>
                 <a:spcPts val="300"/>
               </a:spcAft>
             </a:pPr>
             <a:r>
-              <a:rPr sz="1000" b="0" i="0">
-                <a:solidFill>
-                  <a:srgbClr val="5F5F5F"/>
+              <a:rPr sz="1050" b="0" i="0">
+                <a:solidFill>
+                  <a:srgbClr val="505050"/>
                 </a:solidFill>
                 <a:latin typeface="Calibri"/>
               </a:rPr>
-              <a:t>5,594 settlements ranked by real access</a:t>
+              <a:t>5,594 villages ranked by real access</a:t>
             </a:r>
           </a:p>
           <a:p>
             <a:pPr algn="l">
               <a:lnSpc>
-                <a:spcPct val="112000"/>
+                <a:spcPct val="115000"/>
               </a:lnSpc>
               <a:spcAft>
                 <a:spcPts val="300"/>
               </a:spcAft>
             </a:pPr>
             <a:r>
-              <a:rPr sz="1000" b="0" i="0">
-                <a:solidFill>
-                  <a:srgbClr val="5F5F5F"/>
+              <a:rPr sz="1050" b="0" i="0">
+                <a:solidFill>
+                  <a:srgbClr val="505050"/>
                 </a:solidFill>
                 <a:latin typeface="Calibri"/>
               </a:rPr>
-              <a:t>₹0 data cost · 261 tests · 30 UI checks</a:t>
+              <a:t>₹0 data cost  ·  261 tests  ·  30 UI checks</a:t>
             </a:r>
           </a:p>
         </p:txBody>
@@ -7487,7 +7485,7 @@
         <p:spPr>
           <a:xfrm>
             <a:off x="502920" y="1060704"/>
-            <a:ext cx="11155680" cy="237744"/>
+            <a:ext cx="11155680" cy="274320"/>
           </a:xfrm>
           <a:prstGeom prst="rect">
             <a:avLst/>
@@ -7502,20 +7500,20 @@
           <a:p>
             <a:pPr algn="l">
               <a:lnSpc>
-                <a:spcPct val="112000"/>
+                <a:spcPct val="115000"/>
               </a:lnSpc>
               <a:spcAft>
                 <a:spcPts val="0"/>
               </a:spcAft>
             </a:pPr>
             <a:r>
-              <a:rPr sz="1100" b="0" i="0">
+              <a:rPr sz="1150" b="0" i="0">
                 <a:solidFill>
                   <a:srgbClr val="1F4E79"/>
                 </a:solidFill>
                 <a:latin typeface="Calibri"/>
               </a:rPr>
-              <a:t>Technologies, then how they fit together</a:t>
+              <a:t>Technologies used, and how the system works end to end</a:t>
             </a:r>
           </a:p>
         </p:txBody>
@@ -7529,7 +7527,7 @@
         <p:spPr>
           <a:xfrm>
             <a:off x="502920" y="1463040"/>
-            <a:ext cx="310896" cy="274320"/>
+            <a:ext cx="365760" cy="329184"/>
           </a:xfrm>
           <a:prstGeom prst="rect">
             <a:avLst/>
@@ -7571,7 +7569,7 @@
         <p:spPr>
           <a:xfrm>
             <a:off x="502920" y="1463040"/>
-            <a:ext cx="310896" cy="274320"/>
+            <a:ext cx="365760" cy="329184"/>
           </a:xfrm>
           <a:prstGeom prst="rect">
             <a:avLst/>
@@ -7593,7 +7591,7 @@
               </a:spcAft>
             </a:pPr>
             <a:r>
-              <a:rPr sz="950" b="1" i="0">
+              <a:rPr sz="1100" b="1" i="0">
                 <a:solidFill>
                   <a:srgbClr val="FFFFFF"/>
                 </a:solidFill>
@@ -7612,8 +7610,8 @@
         </p:nvSpPr>
         <p:spPr>
           <a:xfrm>
-            <a:off x="923544" y="1444752"/>
-            <a:ext cx="10762488" cy="310896"/>
+            <a:off x="978408" y="1435608"/>
+            <a:ext cx="10707624" cy="502920"/>
           </a:xfrm>
           <a:prstGeom prst="rect">
             <a:avLst/>
@@ -7621,10 +7619,29 @@
           <a:noFill/>
         </p:spPr>
         <p:txBody>
-          <a:bodyPr wrap="square" lIns="0" rIns="0" tIns="0" bIns="0" anchor="ctr">
+          <a:bodyPr wrap="square" lIns="0" rIns="0" tIns="0" bIns="0" anchor="t">
             <a:spAutoFit/>
           </a:bodyPr>
           <a:lstStyle/>
+          <a:p>
+            <a:pPr algn="l">
+              <a:lnSpc>
+                <a:spcPct val="100000"/>
+              </a:lnSpc>
+              <a:spcAft>
+                <a:spcPts val="100"/>
+              </a:spcAft>
+            </a:pPr>
+            <a:r>
+              <a:rPr sz="1300" b="1" i="0">
+                <a:solidFill>
+                  <a:srgbClr val="1A1A1A"/>
+                </a:solidFill>
+                <a:latin typeface="Calibri"/>
+              </a:rPr>
+              <a:t>Technologies to be used</a:t>
+            </a:r>
+          </a:p>
           <a:p>
             <a:pPr algn="l">
               <a:lnSpc>
@@ -7635,13 +7652,13 @@
               </a:spcAft>
             </a:pPr>
             <a:r>
-              <a:rPr sz="1200" b="1" i="0">
-                <a:solidFill>
-                  <a:srgbClr val="1A1A1A"/>
+              <a:rPr sz="1000" b="0" i="1">
+                <a:solidFill>
+                  <a:srgbClr val="505050"/>
                 </a:solidFill>
                 <a:latin typeface="Calibri"/>
               </a:rPr>
-              <a:t>Technologies to be used</a:t>
+              <a:t>(e.g. programming languages, frameworks, hardware)</a:t>
             </a:r>
           </a:p>
         </p:txBody>
@@ -7654,8 +7671,8 @@
         </p:nvSpPr>
         <p:spPr>
           <a:xfrm>
-            <a:off x="502920" y="1810512"/>
-            <a:ext cx="2679192" cy="658368"/>
+            <a:off x="502920" y="2084832"/>
+            <a:ext cx="2679192" cy="676656"/>
           </a:xfrm>
           <a:prstGeom prst="rect">
             <a:avLst/>
@@ -7696,8 +7713,8 @@
         </p:nvSpPr>
         <p:spPr>
           <a:xfrm>
-            <a:off x="630936" y="1883664"/>
-            <a:ext cx="2423160" cy="530352"/>
+            <a:off x="630936" y="2157984"/>
+            <a:ext cx="2423160" cy="548640"/>
           </a:xfrm>
           <a:prstGeom prst="rect">
             <a:avLst/>
@@ -7712,14 +7729,14 @@
           <a:p>
             <a:pPr algn="l">
               <a:lnSpc>
-                <a:spcPct val="112000"/>
+                <a:spcPct val="115000"/>
               </a:lnSpc>
               <a:spcAft>
                 <a:spcPts val="200"/>
               </a:spcAft>
             </a:pPr>
             <a:r>
-              <a:rPr sz="900" b="1" i="0">
+              <a:rPr sz="1000" b="1" i="0">
                 <a:solidFill>
                   <a:srgbClr val="1F4E79"/>
                 </a:solidFill>
@@ -7731,14 +7748,14 @@
           <a:p>
             <a:pPr algn="l">
               <a:lnSpc>
-                <a:spcPct val="105000"/>
+                <a:spcPct val="110000"/>
               </a:lnSpc>
               <a:spcAft>
                 <a:spcPts val="0"/>
               </a:spcAft>
             </a:pPr>
             <a:r>
-              <a:rPr sz="950" b="0" i="0">
+              <a:rPr sz="1050" b="0" i="0">
                 <a:solidFill>
                   <a:srgbClr val="1A1A1A"/>
                 </a:solidFill>
@@ -7757,8 +7774,8 @@
         </p:nvSpPr>
         <p:spPr>
           <a:xfrm>
-            <a:off x="3300984" y="1810512"/>
-            <a:ext cx="2679192" cy="658368"/>
+            <a:off x="3300984" y="2084832"/>
+            <a:ext cx="2679192" cy="676656"/>
           </a:xfrm>
           <a:prstGeom prst="rect">
             <a:avLst/>
@@ -7799,8 +7816,8 @@
         </p:nvSpPr>
         <p:spPr>
           <a:xfrm>
-            <a:off x="3429000" y="1883664"/>
-            <a:ext cx="2423160" cy="530352"/>
+            <a:off x="3429000" y="2157984"/>
+            <a:ext cx="2423160" cy="548640"/>
           </a:xfrm>
           <a:prstGeom prst="rect">
             <a:avLst/>
@@ -7815,14 +7832,14 @@
           <a:p>
             <a:pPr algn="l">
               <a:lnSpc>
-                <a:spcPct val="112000"/>
+                <a:spcPct val="115000"/>
               </a:lnSpc>
               <a:spcAft>
                 <a:spcPts val="200"/>
               </a:spcAft>
             </a:pPr>
             <a:r>
-              <a:rPr sz="900" b="1" i="0">
+              <a:rPr sz="1000" b="1" i="0">
                 <a:solidFill>
                   <a:srgbClr val="1F4E79"/>
                 </a:solidFill>
@@ -7834,14 +7851,14 @@
           <a:p>
             <a:pPr algn="l">
               <a:lnSpc>
-                <a:spcPct val="105000"/>
+                <a:spcPct val="110000"/>
               </a:lnSpc>
               <a:spcAft>
                 <a:spcPts val="0"/>
               </a:spcAft>
             </a:pPr>
             <a:r>
-              <a:rPr sz="950" b="0" i="0">
+              <a:rPr sz="1050" b="0" i="0">
                 <a:solidFill>
                   <a:srgbClr val="1A1A1A"/>
                 </a:solidFill>
@@ -7860,8 +7877,8 @@
         </p:nvSpPr>
         <p:spPr>
           <a:xfrm>
-            <a:off x="6099048" y="1810512"/>
-            <a:ext cx="2679192" cy="658368"/>
+            <a:off x="6099048" y="2084832"/>
+            <a:ext cx="2679192" cy="676656"/>
           </a:xfrm>
           <a:prstGeom prst="rect">
             <a:avLst/>
@@ -7902,8 +7919,8 @@
         </p:nvSpPr>
         <p:spPr>
           <a:xfrm>
-            <a:off x="6227064" y="1883664"/>
-            <a:ext cx="2423160" cy="530352"/>
+            <a:off x="6227064" y="2157984"/>
+            <a:ext cx="2423160" cy="548640"/>
           </a:xfrm>
           <a:prstGeom prst="rect">
             <a:avLst/>
@@ -7918,14 +7935,14 @@
           <a:p>
             <a:pPr algn="l">
               <a:lnSpc>
-                <a:spcPct val="112000"/>
+                <a:spcPct val="115000"/>
               </a:lnSpc>
               <a:spcAft>
                 <a:spcPts val="200"/>
               </a:spcAft>
             </a:pPr>
             <a:r>
-              <a:rPr sz="900" b="1" i="0">
+              <a:rPr sz="1000" b="1" i="0">
                 <a:solidFill>
                   <a:srgbClr val="1F4E79"/>
                 </a:solidFill>
@@ -7937,20 +7954,20 @@
           <a:p>
             <a:pPr algn="l">
               <a:lnSpc>
-                <a:spcPct val="105000"/>
+                <a:spcPct val="110000"/>
               </a:lnSpc>
               <a:spcAft>
                 <a:spcPts val="0"/>
               </a:spcAft>
             </a:pPr>
             <a:r>
-              <a:rPr sz="950" b="0" i="0">
+              <a:rPr sz="1050" b="0" i="0">
                 <a:solidFill>
                   <a:srgbClr val="1A1A1A"/>
                 </a:solidFill>
                 <a:latin typeface="Calibri"/>
               </a:rPr>
-              <a:t>MapLibre GL — vendored, zero build step</a:t>
+              <a:t>MapLibre GL - vendored, zero build step</a:t>
             </a:r>
           </a:p>
         </p:txBody>
@@ -7963,8 +7980,8 @@
         </p:nvSpPr>
         <p:spPr>
           <a:xfrm>
-            <a:off x="8897112" y="1810512"/>
-            <a:ext cx="2679192" cy="658368"/>
+            <a:off x="8897112" y="2084832"/>
+            <a:ext cx="2679192" cy="676656"/>
           </a:xfrm>
           <a:prstGeom prst="rect">
             <a:avLst/>
@@ -8005,8 +8022,8 @@
         </p:nvSpPr>
         <p:spPr>
           <a:xfrm>
-            <a:off x="9025128" y="1883664"/>
-            <a:ext cx="2423160" cy="530352"/>
+            <a:off x="9025128" y="2157984"/>
+            <a:ext cx="2423160" cy="548640"/>
           </a:xfrm>
           <a:prstGeom prst="rect">
             <a:avLst/>
@@ -8021,14 +8038,14 @@
           <a:p>
             <a:pPr algn="l">
               <a:lnSpc>
-                <a:spcPct val="112000"/>
+                <a:spcPct val="115000"/>
               </a:lnSpc>
               <a:spcAft>
                 <a:spcPts val="200"/>
               </a:spcAft>
             </a:pPr>
             <a:r>
-              <a:rPr sz="900" b="1" i="0">
+              <a:rPr sz="1000" b="1" i="0">
                 <a:solidFill>
                   <a:srgbClr val="1F4E79"/>
                 </a:solidFill>
@@ -8040,20 +8057,20 @@
           <a:p>
             <a:pPr algn="l">
               <a:lnSpc>
-                <a:spcPct val="105000"/>
+                <a:spcPct val="110000"/>
               </a:lnSpc>
               <a:spcAft>
                 <a:spcPts val="0"/>
               </a:spcAft>
             </a:pPr>
             <a:r>
-              <a:rPr sz="950" b="0" i="0">
+              <a:rPr sz="1050" b="0" i="0">
                 <a:solidFill>
                   <a:srgbClr val="1A1A1A"/>
                 </a:solidFill>
                 <a:latin typeface="Calibri"/>
               </a:rPr>
-              <a:t>pytest — 261 tests  ·  Playwright — 30 UI checks</a:t>
+              <a:t>pytest - 261 tests  ·  Playwright - 30 UI checks</a:t>
             </a:r>
           </a:p>
         </p:txBody>
@@ -8066,8 +8083,8 @@
         </p:nvSpPr>
         <p:spPr>
           <a:xfrm>
-            <a:off x="502920" y="2615184"/>
-            <a:ext cx="310896" cy="274320"/>
+            <a:off x="502920" y="2980944"/>
+            <a:ext cx="365760" cy="329184"/>
           </a:xfrm>
           <a:prstGeom prst="rect">
             <a:avLst/>
@@ -8108,8 +8125,8 @@
         </p:nvSpPr>
         <p:spPr>
           <a:xfrm>
-            <a:off x="502920" y="2615184"/>
-            <a:ext cx="310896" cy="274320"/>
+            <a:off x="502920" y="2980944"/>
+            <a:ext cx="365760" cy="329184"/>
           </a:xfrm>
           <a:prstGeom prst="rect">
             <a:avLst/>
@@ -8131,7 +8148,7 @@
               </a:spcAft>
             </a:pPr>
             <a:r>
-              <a:rPr sz="950" b="1" i="0">
+              <a:rPr sz="1100" b="1" i="0">
                 <a:solidFill>
                   <a:srgbClr val="FFFFFF"/>
                 </a:solidFill>
@@ -8150,8 +8167,8 @@
         </p:nvSpPr>
         <p:spPr>
           <a:xfrm>
-            <a:off x="923544" y="2596896"/>
-            <a:ext cx="10762488" cy="310896"/>
+            <a:off x="978408" y="2953512"/>
+            <a:ext cx="10707624" cy="502920"/>
           </a:xfrm>
           <a:prstGeom prst="rect">
             <a:avLst/>
@@ -8159,10 +8176,29 @@
           <a:noFill/>
         </p:spPr>
         <p:txBody>
-          <a:bodyPr wrap="square" lIns="0" rIns="0" tIns="0" bIns="0" anchor="ctr">
+          <a:bodyPr wrap="square" lIns="0" rIns="0" tIns="0" bIns="0" anchor="t">
             <a:spAutoFit/>
           </a:bodyPr>
           <a:lstStyle/>
+          <a:p>
+            <a:pPr algn="l">
+              <a:lnSpc>
+                <a:spcPct val="100000"/>
+              </a:lnSpc>
+              <a:spcAft>
+                <a:spcPts val="100"/>
+              </a:spcAft>
+            </a:pPr>
+            <a:r>
+              <a:rPr sz="1300" b="1" i="0">
+                <a:solidFill>
+                  <a:srgbClr val="1A1A1A"/>
+                </a:solidFill>
+                <a:latin typeface="Calibri"/>
+              </a:rPr>
+              <a:t>Methodology and process for implementation</a:t>
+            </a:r>
+          </a:p>
           <a:p>
             <a:pPr algn="l">
               <a:lnSpc>
@@ -8173,68 +8209,26 @@
               </a:spcAft>
             </a:pPr>
             <a:r>
-              <a:rPr sz="1200" b="1" i="0">
-                <a:solidFill>
-                  <a:srgbClr val="1A1A1A"/>
+              <a:rPr sz="1000" b="0" i="1">
+                <a:solidFill>
+                  <a:srgbClr val="505050"/>
                 </a:solidFill>
                 <a:latin typeface="Calibri"/>
               </a:rPr>
-              <a:t>Methodology and process for implementation</a:t>
-            </a:r>
-          </a:p>
-        </p:txBody>
-      </p:sp>
-      <p:sp>
-        <p:nvSpPr>
-          <p:cNvPr id="17425" name="TextBox 17424"/>
-          <p:cNvSpPr txBox="1"/>
-          <p:nvPr/>
-        </p:nvSpPr>
-        <p:spPr>
-          <a:xfrm>
-            <a:off x="8439912" y="2606040"/>
-            <a:ext cx="3246120" cy="274320"/>
-          </a:xfrm>
-          <a:prstGeom prst="rect">
-            <a:avLst/>
-          </a:prstGeom>
-          <a:noFill/>
-        </p:spPr>
-        <p:txBody>
-          <a:bodyPr wrap="square" lIns="0" rIns="0" tIns="0" bIns="0" anchor="t">
-            <a:spAutoFit/>
-          </a:bodyPr>
-          <a:lstStyle/>
-          <a:p>
-            <a:pPr algn="r">
-              <a:lnSpc>
-                <a:spcPct val="112000"/>
-              </a:lnSpc>
-              <a:spcAft>
-                <a:spcPts val="0"/>
-              </a:spcAft>
-            </a:pPr>
-            <a:r>
-              <a:rPr sz="950" b="0" i="1">
-                <a:solidFill>
-                  <a:srgbClr val="8A8A8A"/>
-                </a:solidFill>
-                <a:latin typeface="Calibri"/>
-              </a:rPr>
-              <a:t>(flow chart — working prototype)</a:t>
-            </a:r>
-          </a:p>
-        </p:txBody>
-      </p:sp>
-      <p:sp>
-        <p:nvSpPr>
-          <p:cNvPr id="17426" name="Rectangle 17425"/>
+              <a:t>(Flow Charts / Images / working prototype)</a:t>
+            </a:r>
+          </a:p>
+        </p:txBody>
+      </p:sp>
+      <p:sp>
+        <p:nvSpPr>
+          <p:cNvPr id="17425" name="Rectangle 17424"/>
           <p:cNvSpPr/>
           <p:nvPr/>
         </p:nvSpPr>
         <p:spPr>
           <a:xfrm>
-            <a:off x="502920" y="3090672"/>
+            <a:off x="502920" y="3621024"/>
             <a:ext cx="1993392" cy="1417320"/>
           </a:xfrm>
           <a:prstGeom prst="rect">
@@ -8272,14 +8266,14 @@
       </p:sp>
       <p:sp>
         <p:nvSpPr>
-          <p:cNvPr id="17427" name="Rectangle 17426"/>
+          <p:cNvPr id="17426" name="Rectangle 17425"/>
           <p:cNvSpPr/>
           <p:nvPr/>
         </p:nvSpPr>
         <p:spPr>
           <a:xfrm>
-            <a:off x="502920" y="3090672"/>
-            <a:ext cx="1993392" cy="310896"/>
+            <a:off x="502920" y="3621024"/>
+            <a:ext cx="1993392" cy="329184"/>
           </a:xfrm>
           <a:prstGeom prst="rect">
             <a:avLst/>
@@ -8314,14 +8308,14 @@
       </p:sp>
       <p:sp>
         <p:nvSpPr>
-          <p:cNvPr id="17428" name="TextBox 17427"/>
+          <p:cNvPr id="17427" name="TextBox 17426"/>
           <p:cNvSpPr txBox="1"/>
           <p:nvPr/>
         </p:nvSpPr>
         <p:spPr>
           <a:xfrm>
-            <a:off x="502920" y="3090672"/>
-            <a:ext cx="1993392" cy="310896"/>
+            <a:off x="502920" y="3621024"/>
+            <a:ext cx="1993392" cy="329184"/>
           </a:xfrm>
           <a:prstGeom prst="rect">
             <a:avLst/>
@@ -8343,7 +8337,7 @@
               </a:spcAft>
             </a:pPr>
             <a:r>
-              <a:rPr sz="1100" b="1" i="0">
+              <a:rPr sz="1150" b="1" i="0">
                 <a:solidFill>
                   <a:srgbClr val="1F4E79"/>
                 </a:solidFill>
@@ -8356,14 +8350,14 @@
       </p:sp>
       <p:sp>
         <p:nvSpPr>
-          <p:cNvPr id="17429" name="TextBox 17428"/>
+          <p:cNvPr id="17428" name="TextBox 17427"/>
           <p:cNvSpPr txBox="1"/>
           <p:nvPr/>
         </p:nvSpPr>
         <p:spPr>
           <a:xfrm>
-            <a:off x="612648" y="3493008"/>
-            <a:ext cx="1773936" cy="923544"/>
+            <a:off x="612648" y="4041648"/>
+            <a:ext cx="1773936" cy="905256"/>
           </a:xfrm>
           <a:prstGeom prst="rect">
             <a:avLst/>
@@ -8378,35 +8372,35 @@
           <a:p>
             <a:pPr algn="ctr">
               <a:lnSpc>
-                <a:spcPct val="115000"/>
+                <a:spcPct val="120000"/>
               </a:lnSpc>
               <a:spcAft>
                 <a:spcPts val="200"/>
               </a:spcAft>
             </a:pPr>
             <a:r>
-              <a:rPr sz="950" b="0" i="0">
-                <a:solidFill>
-                  <a:srgbClr val="5F5F5F"/>
+              <a:rPr sz="1050" b="0" i="0">
+                <a:solidFill>
+                  <a:srgbClr val="505050"/>
                 </a:solidFill>
                 <a:latin typeface="Calibri"/>
               </a:rPr>
-              <a:t>OSM roads &amp; places</a:t>
+              <a:t>OSM roads and places</a:t>
             </a:r>
           </a:p>
           <a:p>
             <a:pPr algn="ctr">
               <a:lnSpc>
-                <a:spcPct val="115000"/>
+                <a:spcPct val="120000"/>
               </a:lnSpc>
               <a:spcAft>
                 <a:spcPts val="200"/>
               </a:spcAft>
             </a:pPr>
             <a:r>
-              <a:rPr sz="950" b="0" i="0">
-                <a:solidFill>
-                  <a:srgbClr val="5F5F5F"/>
+              <a:rPr sz="1050" b="0" i="0">
+                <a:solidFill>
+                  <a:srgbClr val="505050"/>
                 </a:solidFill>
                 <a:latin typeface="Calibri"/>
               </a:rPr>
@@ -8416,16 +8410,16 @@
           <a:p>
             <a:pPr algn="ctr">
               <a:lnSpc>
-                <a:spcPct val="115000"/>
+                <a:spcPct val="120000"/>
               </a:lnSpc>
               <a:spcAft>
                 <a:spcPts val="200"/>
               </a:spcAft>
             </a:pPr>
             <a:r>
-              <a:rPr sz="950" b="0" i="0">
-                <a:solidFill>
-                  <a:srgbClr val="5F5F5F"/>
+              <a:rPr sz="1050" b="0" i="0">
+                <a:solidFill>
+                  <a:srgbClr val="505050"/>
                 </a:solidFill>
                 <a:latin typeface="Calibri"/>
               </a:rPr>
@@ -8436,20 +8430,20 @@
       </p:sp>
       <p:sp>
         <p:nvSpPr>
-          <p:cNvPr id="17430" name="Right Arrow 17429"/>
+          <p:cNvPr id="17429" name="Right Arrow 17428"/>
           <p:cNvSpPr/>
           <p:nvPr/>
         </p:nvSpPr>
         <p:spPr>
           <a:xfrm>
-            <a:off x="2514600" y="3749040"/>
+            <a:off x="2514600" y="4279392"/>
             <a:ext cx="164592" cy="100584"/>
           </a:xfrm>
           <a:prstGeom prst="rightArrow">
             <a:avLst/>
           </a:prstGeom>
           <a:solidFill>
-            <a:srgbClr val="8A8A8A"/>
+            <a:srgbClr val="BFBFBF"/>
           </a:solidFill>
           <a:ln>
             <a:noFill/>
@@ -8478,13 +8472,13 @@
       </p:sp>
       <p:sp>
         <p:nvSpPr>
-          <p:cNvPr id="17431" name="Rectangle 17430"/>
+          <p:cNvPr id="17430" name="Rectangle 17429"/>
           <p:cNvSpPr/>
           <p:nvPr/>
         </p:nvSpPr>
         <p:spPr>
           <a:xfrm>
-            <a:off x="2697480" y="3090672"/>
+            <a:off x="2697480" y="3621024"/>
             <a:ext cx="1993392" cy="1417320"/>
           </a:xfrm>
           <a:prstGeom prst="rect">
@@ -8522,14 +8516,14 @@
       </p:sp>
       <p:sp>
         <p:nvSpPr>
-          <p:cNvPr id="17432" name="Rectangle 17431"/>
+          <p:cNvPr id="17431" name="Rectangle 17430"/>
           <p:cNvSpPr/>
           <p:nvPr/>
         </p:nvSpPr>
         <p:spPr>
           <a:xfrm>
-            <a:off x="2697480" y="3090672"/>
-            <a:ext cx="1993392" cy="310896"/>
+            <a:off x="2697480" y="3621024"/>
+            <a:ext cx="1993392" cy="329184"/>
           </a:xfrm>
           <a:prstGeom prst="rect">
             <a:avLst/>
@@ -8564,14 +8558,14 @@
       </p:sp>
       <p:sp>
         <p:nvSpPr>
-          <p:cNvPr id="17433" name="TextBox 17432"/>
+          <p:cNvPr id="17432" name="TextBox 17431"/>
           <p:cNvSpPr txBox="1"/>
           <p:nvPr/>
         </p:nvSpPr>
         <p:spPr>
           <a:xfrm>
-            <a:off x="2697480" y="3090672"/>
-            <a:ext cx="1993392" cy="310896"/>
+            <a:off x="2697480" y="3621024"/>
+            <a:ext cx="1993392" cy="329184"/>
           </a:xfrm>
           <a:prstGeom prst="rect">
             <a:avLst/>
@@ -8593,7 +8587,7 @@
               </a:spcAft>
             </a:pPr>
             <a:r>
-              <a:rPr sz="1100" b="1" i="0">
+              <a:rPr sz="1150" b="1" i="0">
                 <a:solidFill>
                   <a:srgbClr val="1F4E79"/>
                 </a:solidFill>
@@ -8606,14 +8600,14 @@
       </p:sp>
       <p:sp>
         <p:nvSpPr>
-          <p:cNvPr id="17434" name="TextBox 17433"/>
+          <p:cNvPr id="17433" name="TextBox 17432"/>
           <p:cNvSpPr txBox="1"/>
           <p:nvPr/>
         </p:nvSpPr>
         <p:spPr>
           <a:xfrm>
-            <a:off x="2807208" y="3493008"/>
-            <a:ext cx="1773936" cy="923544"/>
+            <a:off x="2807208" y="4041648"/>
+            <a:ext cx="1773936" cy="905256"/>
           </a:xfrm>
           <a:prstGeom prst="rect">
             <a:avLst/>
@@ -8628,35 +8622,35 @@
           <a:p>
             <a:pPr algn="ctr">
               <a:lnSpc>
-                <a:spcPct val="115000"/>
+                <a:spcPct val="120000"/>
               </a:lnSpc>
               <a:spcAft>
                 <a:spcPts val="200"/>
               </a:spcAft>
             </a:pPr>
             <a:r>
-              <a:rPr sz="950" b="0" i="0">
-                <a:solidFill>
-                  <a:srgbClr val="5F5F5F"/>
+              <a:rPr sz="1050" b="0" i="0">
+                <a:solidFill>
+                  <a:srgbClr val="505050"/>
                 </a:solidFill>
                 <a:latin typeface="Calibri"/>
               </a:rPr>
-              <a:t>Contract OSM ways into</a:t>
+              <a:t>Turn OSM ways into</a:t>
             </a:r>
           </a:p>
           <a:p>
             <a:pPr algn="ctr">
               <a:lnSpc>
-                <a:spcPct val="115000"/>
+                <a:spcPct val="120000"/>
               </a:lnSpc>
               <a:spcAft>
                 <a:spcPts val="200"/>
               </a:spcAft>
             </a:pPr>
             <a:r>
-              <a:rPr sz="950" b="0" i="0">
-                <a:solidFill>
-                  <a:srgbClr val="5F5F5F"/>
+              <a:rPr sz="1050" b="0" i="0">
+                <a:solidFill>
+                  <a:srgbClr val="505050"/>
                 </a:solidFill>
                 <a:latin typeface="Calibri"/>
               </a:rPr>
@@ -8666,40 +8660,40 @@
           <a:p>
             <a:pPr algn="ctr">
               <a:lnSpc>
-                <a:spcPct val="115000"/>
+                <a:spcPct val="120000"/>
               </a:lnSpc>
               <a:spcAft>
                 <a:spcPts val="200"/>
               </a:spcAft>
             </a:pPr>
             <a:r>
-              <a:rPr sz="950" b="0" i="0">
-                <a:solidFill>
-                  <a:srgbClr val="5F5F5F"/>
+              <a:rPr sz="1050" b="0" i="0">
+                <a:solidFill>
+                  <a:srgbClr val="505050"/>
                 </a:solidFill>
                 <a:latin typeface="Calibri"/>
               </a:rPr>
-              <a:t>+ 5,594 settlements</a:t>
-            </a:r>
-          </a:p>
-        </p:txBody>
-      </p:sp>
-      <p:sp>
-        <p:nvSpPr>
-          <p:cNvPr id="17435" name="Right Arrow 17434"/>
+              <a:t>plus 5,594 villages</a:t>
+            </a:r>
+          </a:p>
+        </p:txBody>
+      </p:sp>
+      <p:sp>
+        <p:nvSpPr>
+          <p:cNvPr id="17434" name="Right Arrow 17433"/>
           <p:cNvSpPr/>
           <p:nvPr/>
         </p:nvSpPr>
         <p:spPr>
           <a:xfrm>
-            <a:off x="4709160" y="3749040"/>
+            <a:off x="4709160" y="4279392"/>
             <a:ext cx="164592" cy="100584"/>
           </a:xfrm>
           <a:prstGeom prst="rightArrow">
             <a:avLst/>
           </a:prstGeom>
           <a:solidFill>
-            <a:srgbClr val="8A8A8A"/>
+            <a:srgbClr val="BFBFBF"/>
           </a:solidFill>
           <a:ln>
             <a:noFill/>
@@ -8728,13 +8722,13 @@
       </p:sp>
       <p:sp>
         <p:nvSpPr>
-          <p:cNvPr id="17436" name="Rectangle 17435"/>
+          <p:cNvPr id="17435" name="Rectangle 17434"/>
           <p:cNvSpPr/>
           <p:nvPr/>
         </p:nvSpPr>
         <p:spPr>
           <a:xfrm>
-            <a:off x="4892040" y="3090672"/>
+            <a:off x="4892040" y="3621024"/>
             <a:ext cx="1993392" cy="1417320"/>
           </a:xfrm>
           <a:prstGeom prst="rect">
@@ -8772,14 +8766,14 @@
       </p:sp>
       <p:sp>
         <p:nvSpPr>
-          <p:cNvPr id="17437" name="Rectangle 17436"/>
+          <p:cNvPr id="17436" name="Rectangle 17435"/>
           <p:cNvSpPr/>
           <p:nvPr/>
         </p:nvSpPr>
         <p:spPr>
           <a:xfrm>
-            <a:off x="4892040" y="3090672"/>
-            <a:ext cx="1993392" cy="310896"/>
+            <a:off x="4892040" y="3621024"/>
+            <a:ext cx="1993392" cy="329184"/>
           </a:xfrm>
           <a:prstGeom prst="rect">
             <a:avLst/>
@@ -8814,14 +8808,14 @@
       </p:sp>
       <p:sp>
         <p:nvSpPr>
-          <p:cNvPr id="17438" name="TextBox 17437"/>
+          <p:cNvPr id="17437" name="TextBox 17436"/>
           <p:cNvSpPr txBox="1"/>
           <p:nvPr/>
         </p:nvSpPr>
         <p:spPr>
           <a:xfrm>
-            <a:off x="4892040" y="3090672"/>
-            <a:ext cx="1993392" cy="310896"/>
+            <a:off x="4892040" y="3621024"/>
+            <a:ext cx="1993392" cy="329184"/>
           </a:xfrm>
           <a:prstGeom prst="rect">
             <a:avLst/>
@@ -8843,7 +8837,7 @@
               </a:spcAft>
             </a:pPr>
             <a:r>
-              <a:rPr sz="1100" b="1" i="0">
+              <a:rPr sz="1150" b="1" i="0">
                 <a:solidFill>
                   <a:srgbClr val="1F4E79"/>
                 </a:solidFill>
@@ -8856,14 +8850,14 @@
       </p:sp>
       <p:sp>
         <p:nvSpPr>
-          <p:cNvPr id="17439" name="TextBox 17438"/>
+          <p:cNvPr id="17438" name="TextBox 17437"/>
           <p:cNvSpPr txBox="1"/>
           <p:nvPr/>
         </p:nvSpPr>
         <p:spPr>
           <a:xfrm>
-            <a:off x="5001768" y="3493008"/>
-            <a:ext cx="1773936" cy="923544"/>
+            <a:off x="5001768" y="4041648"/>
+            <a:ext cx="1773936" cy="905256"/>
           </a:xfrm>
           <a:prstGeom prst="rect">
             <a:avLst/>
@@ -8878,54 +8872,54 @@
           <a:p>
             <a:pPr algn="ctr">
               <a:lnSpc>
-                <a:spcPct val="115000"/>
+                <a:spcPct val="120000"/>
               </a:lnSpc>
               <a:spcAft>
                 <a:spcPts val="200"/>
               </a:spcAft>
             </a:pPr>
             <a:r>
-              <a:rPr sz="950" b="0" i="0">
-                <a:solidFill>
-                  <a:srgbClr val="5F5F5F"/>
+              <a:rPr sz="1050" b="0" i="0">
+                <a:solidFill>
+                  <a:srgbClr val="505050"/>
                 </a:solidFill>
                 <a:latin typeface="Calibri"/>
               </a:rPr>
-              <a:t>Risk model (landslide +</a:t>
+              <a:t>Risk model (landslide</a:t>
             </a:r>
           </a:p>
           <a:p>
             <a:pPr algn="ctr">
               <a:lnSpc>
-                <a:spcPct val="115000"/>
+                <a:spcPct val="120000"/>
               </a:lnSpc>
               <a:spcAft>
                 <a:spcPts val="200"/>
               </a:spcAft>
             </a:pPr>
             <a:r>
-              <a:rPr sz="950" b="0" i="0">
-                <a:solidFill>
-                  <a:srgbClr val="5F5F5F"/>
+              <a:rPr sz="1050" b="0" i="0">
+                <a:solidFill>
+                  <a:srgbClr val="505050"/>
                 </a:solidFill>
                 <a:latin typeface="Calibri"/>
               </a:rPr>
-              <a:t>flood) · cost model ·</a:t>
+              <a:t>and flood), cost model,</a:t>
             </a:r>
           </a:p>
           <a:p>
             <a:pPr algn="ctr">
               <a:lnSpc>
-                <a:spcPct val="115000"/>
+                <a:spcPct val="120000"/>
               </a:lnSpc>
               <a:spcAft>
                 <a:spcPts val="200"/>
               </a:spcAft>
             </a:pPr>
             <a:r>
-              <a:rPr sz="950" b="0" i="0">
-                <a:solidFill>
-                  <a:srgbClr val="5F5F5F"/>
+              <a:rPr sz="1050" b="0" i="0">
+                <a:solidFill>
+                  <a:srgbClr val="505050"/>
                 </a:solidFill>
                 <a:latin typeface="Calibri"/>
               </a:rPr>
@@ -8936,20 +8930,20 @@
       </p:sp>
       <p:sp>
         <p:nvSpPr>
-          <p:cNvPr id="17440" name="Right Arrow 17439"/>
+          <p:cNvPr id="17439" name="Right Arrow 17438"/>
           <p:cNvSpPr/>
           <p:nvPr/>
         </p:nvSpPr>
         <p:spPr>
           <a:xfrm>
-            <a:off x="6903720" y="3749040"/>
+            <a:off x="6903720" y="4279392"/>
             <a:ext cx="164592" cy="100584"/>
           </a:xfrm>
           <a:prstGeom prst="rightArrow">
             <a:avLst/>
           </a:prstGeom>
           <a:solidFill>
-            <a:srgbClr val="8A8A8A"/>
+            <a:srgbClr val="BFBFBF"/>
           </a:solidFill>
           <a:ln>
             <a:noFill/>
@@ -8978,13 +8972,13 @@
       </p:sp>
       <p:sp>
         <p:nvSpPr>
-          <p:cNvPr id="17441" name="Rectangle 17440"/>
+          <p:cNvPr id="17440" name="Rectangle 17439"/>
           <p:cNvSpPr/>
           <p:nvPr/>
         </p:nvSpPr>
         <p:spPr>
           <a:xfrm>
-            <a:off x="7086600" y="3090672"/>
+            <a:off x="7086600" y="3621024"/>
             <a:ext cx="1993392" cy="1417320"/>
           </a:xfrm>
           <a:prstGeom prst="rect">
@@ -9022,14 +9016,14 @@
       </p:sp>
       <p:sp>
         <p:nvSpPr>
-          <p:cNvPr id="17442" name="Rectangle 17441"/>
+          <p:cNvPr id="17441" name="Rectangle 17440"/>
           <p:cNvSpPr/>
           <p:nvPr/>
         </p:nvSpPr>
         <p:spPr>
           <a:xfrm>
-            <a:off x="7086600" y="3090672"/>
-            <a:ext cx="1993392" cy="310896"/>
+            <a:off x="7086600" y="3621024"/>
+            <a:ext cx="1993392" cy="329184"/>
           </a:xfrm>
           <a:prstGeom prst="rect">
             <a:avLst/>
@@ -9064,14 +9058,14 @@
       </p:sp>
       <p:sp>
         <p:nvSpPr>
-          <p:cNvPr id="17443" name="TextBox 17442"/>
+          <p:cNvPr id="17442" name="TextBox 17441"/>
           <p:cNvSpPr txBox="1"/>
           <p:nvPr/>
         </p:nvSpPr>
         <p:spPr>
           <a:xfrm>
-            <a:off x="7086600" y="3090672"/>
-            <a:ext cx="1993392" cy="310896"/>
+            <a:off x="7086600" y="3621024"/>
+            <a:ext cx="1993392" cy="329184"/>
           </a:xfrm>
           <a:prstGeom prst="rect">
             <a:avLst/>
@@ -9093,7 +9087,7 @@
               </a:spcAft>
             </a:pPr>
             <a:r>
-              <a:rPr sz="1100" b="1" i="0">
+              <a:rPr sz="1150" b="1" i="0">
                 <a:solidFill>
                   <a:srgbClr val="1F4E79"/>
                 </a:solidFill>
@@ -9106,14 +9100,14 @@
       </p:sp>
       <p:sp>
         <p:nvSpPr>
-          <p:cNvPr id="17444" name="TextBox 17443"/>
+          <p:cNvPr id="17443" name="TextBox 17442"/>
           <p:cNvSpPr txBox="1"/>
           <p:nvPr/>
         </p:nvSpPr>
         <p:spPr>
           <a:xfrm>
-            <a:off x="7196328" y="3493008"/>
-            <a:ext cx="1773936" cy="923544"/>
+            <a:off x="7196328" y="4041648"/>
+            <a:ext cx="1773936" cy="905256"/>
           </a:xfrm>
           <a:prstGeom prst="rect">
             <a:avLst/>
@@ -9128,78 +9122,78 @@
           <a:p>
             <a:pPr algn="ctr">
               <a:lnSpc>
-                <a:spcPct val="115000"/>
+                <a:spcPct val="120000"/>
               </a:lnSpc>
               <a:spcAft>
                 <a:spcPts val="200"/>
               </a:spcAft>
             </a:pPr>
             <a:r>
-              <a:rPr sz="950" b="0" i="0">
-                <a:solidFill>
-                  <a:srgbClr val="5F5F5F"/>
+              <a:rPr sz="1050" b="0" i="0">
+                <a:solidFill>
+                  <a:srgbClr val="505050"/>
                 </a:solidFill>
                 <a:latin typeface="Calibri"/>
               </a:rPr>
-              <a:t>Plan a route · compare</a:t>
+              <a:t>Plan a route, compare</a:t>
             </a:r>
           </a:p>
           <a:p>
             <a:pPr algn="ctr">
               <a:lnSpc>
-                <a:spcPct val="115000"/>
+                <a:spcPct val="120000"/>
               </a:lnSpc>
               <a:spcAft>
                 <a:spcPts val="200"/>
               </a:spcAft>
             </a:pPr>
             <a:r>
-              <a:rPr sz="950" b="0" i="0">
-                <a:solidFill>
-                  <a:srgbClr val="5F5F5F"/>
+              <a:rPr sz="1050" b="0" i="0">
+                <a:solidFill>
+                  <a:srgbClr val="505050"/>
                 </a:solidFill>
                 <a:latin typeface="Calibri"/>
               </a:rPr>
-              <a:t>options · risk map ·</a:t>
+              <a:t>options, show risk,</a:t>
             </a:r>
           </a:p>
           <a:p>
             <a:pPr algn="ctr">
               <a:lnSpc>
-                <a:spcPct val="115000"/>
+                <a:spcPct val="120000"/>
               </a:lnSpc>
               <a:spcAft>
                 <a:spcPts val="200"/>
               </a:spcAft>
             </a:pPr>
             <a:r>
-              <a:rPr sz="950" b="0" i="0">
-                <a:solidFill>
-                  <a:srgbClr val="5F5F5F"/>
+              <a:rPr sz="1050" b="0" i="0">
+                <a:solidFill>
+                  <a:srgbClr val="505050"/>
                 </a:solidFill>
                 <a:latin typeface="Calibri"/>
               </a:rPr>
-              <a:t>who is cut off</a:t>
-            </a:r>
-          </a:p>
-        </p:txBody>
-      </p:sp>
-      <p:sp>
-        <p:nvSpPr>
-          <p:cNvPr id="17445" name="Right Arrow 17444"/>
+              <a:t>show who is cut off</a:t>
+            </a:r>
+          </a:p>
+        </p:txBody>
+      </p:sp>
+      <p:sp>
+        <p:nvSpPr>
+          <p:cNvPr id="17444" name="Right Arrow 17443"/>
           <p:cNvSpPr/>
           <p:nvPr/>
         </p:nvSpPr>
         <p:spPr>
           <a:xfrm>
-            <a:off x="9098280" y="3749040"/>
+            <a:off x="9098280" y="4279392"/>
             <a:ext cx="164592" cy="100584"/>
           </a:xfrm>
           <a:prstGeom prst="rightArrow">
             <a:avLst/>
           </a:prstGeom>
           <a:solidFill>
-            <a:srgbClr val="8A8A8A"/>
+            <a:srgbClr val="BFBFBF"/>
           </a:solidFill>
           <a:ln>
             <a:noFill/>
@@ -9228,13 +9222,13 @@
       </p:sp>
       <p:sp>
         <p:nvSpPr>
-          <p:cNvPr id="17446" name="Rectangle 17445"/>
+          <p:cNvPr id="17445" name="Rectangle 17444"/>
           <p:cNvSpPr/>
           <p:nvPr/>
         </p:nvSpPr>
         <p:spPr>
           <a:xfrm>
-            <a:off x="9281160" y="3090672"/>
+            <a:off x="9281160" y="3621024"/>
             <a:ext cx="1993392" cy="1417320"/>
           </a:xfrm>
           <a:prstGeom prst="rect">
@@ -9272,14 +9266,14 @@
       </p:sp>
       <p:sp>
         <p:nvSpPr>
-          <p:cNvPr id="17447" name="Rectangle 17446"/>
+          <p:cNvPr id="17446" name="Rectangle 17445"/>
           <p:cNvSpPr/>
           <p:nvPr/>
         </p:nvSpPr>
         <p:spPr>
           <a:xfrm>
-            <a:off x="9281160" y="3090672"/>
-            <a:ext cx="1993392" cy="310896"/>
+            <a:off x="9281160" y="3621024"/>
+            <a:ext cx="1993392" cy="329184"/>
           </a:xfrm>
           <a:prstGeom prst="rect">
             <a:avLst/>
@@ -9314,14 +9308,14 @@
       </p:sp>
       <p:sp>
         <p:nvSpPr>
-          <p:cNvPr id="17448" name="TextBox 17447"/>
+          <p:cNvPr id="17447" name="TextBox 17446"/>
           <p:cNvSpPr txBox="1"/>
           <p:nvPr/>
         </p:nvSpPr>
         <p:spPr>
           <a:xfrm>
-            <a:off x="9281160" y="3090672"/>
-            <a:ext cx="1993392" cy="310896"/>
+            <a:off x="9281160" y="3621024"/>
+            <a:ext cx="1993392" cy="329184"/>
           </a:xfrm>
           <a:prstGeom prst="rect">
             <a:avLst/>
@@ -9343,7 +9337,7 @@
               </a:spcAft>
             </a:pPr>
             <a:r>
-              <a:rPr sz="1100" b="1" i="0">
+              <a:rPr sz="1150" b="1" i="0">
                 <a:solidFill>
                   <a:srgbClr val="1F4E79"/>
                 </a:solidFill>
@@ -9356,14 +9350,14 @@
       </p:sp>
       <p:sp>
         <p:nvSpPr>
-          <p:cNvPr id="17449" name="TextBox 17448"/>
+          <p:cNvPr id="17448" name="TextBox 17447"/>
           <p:cNvSpPr txBox="1"/>
           <p:nvPr/>
         </p:nvSpPr>
         <p:spPr>
           <a:xfrm>
-            <a:off x="9390888" y="3493008"/>
-            <a:ext cx="1773936" cy="923544"/>
+            <a:off x="9390888" y="4041648"/>
+            <a:ext cx="1773936" cy="905256"/>
           </a:xfrm>
           <a:prstGeom prst="rect">
             <a:avLst/>
@@ -9378,16 +9372,16 @@
           <a:p>
             <a:pPr algn="ctr">
               <a:lnSpc>
-                <a:spcPct val="115000"/>
+                <a:spcPct val="120000"/>
               </a:lnSpc>
               <a:spcAft>
                 <a:spcPts val="200"/>
               </a:spcAft>
             </a:pPr>
             <a:r>
-              <a:rPr sz="950" b="0" i="0">
-                <a:solidFill>
-                  <a:srgbClr val="5F5F5F"/>
+              <a:rPr sz="1050" b="0" i="0">
+                <a:solidFill>
+                  <a:srgbClr val="505050"/>
                 </a:solidFill>
                 <a:latin typeface="Calibri"/>
               </a:rPr>
@@ -9397,35 +9391,35 @@
           <a:p>
             <a:pPr algn="ctr">
               <a:lnSpc>
-                <a:spcPct val="115000"/>
+                <a:spcPct val="120000"/>
               </a:lnSpc>
               <a:spcAft>
                 <a:spcPts val="200"/>
               </a:spcAft>
             </a:pPr>
             <a:r>
-              <a:rPr sz="950" b="0" i="0">
-                <a:solidFill>
-                  <a:srgbClr val="5F5F5F"/>
+              <a:rPr sz="1050" b="0" i="0">
+                <a:solidFill>
+                  <a:srgbClr val="505050"/>
                 </a:solidFill>
                 <a:latin typeface="Calibri"/>
               </a:rPr>
-              <a:t>API + dashboard,</a:t>
+              <a:t>api and dashboard,</a:t>
             </a:r>
           </a:p>
           <a:p>
             <a:pPr algn="ctr">
               <a:lnSpc>
-                <a:spcPct val="115000"/>
+                <a:spcPct val="120000"/>
               </a:lnSpc>
               <a:spcAft>
                 <a:spcPts val="200"/>
               </a:spcAft>
             </a:pPr>
             <a:r>
-              <a:rPr sz="950" b="0" i="0">
-                <a:solidFill>
-                  <a:srgbClr val="5F5F5F"/>
+              <a:rPr sz="1050" b="0" i="0">
+                <a:solidFill>
+                  <a:srgbClr val="505050"/>
                 </a:solidFill>
                 <a:latin typeface="Calibri"/>
               </a:rPr>
@@ -9436,13 +9430,13 @@
       </p:sp>
       <p:sp>
         <p:nvSpPr>
-          <p:cNvPr id="17450" name="Rectangle 17449"/>
+          <p:cNvPr id="17449" name="Rectangle 17448"/>
           <p:cNvSpPr/>
           <p:nvPr/>
         </p:nvSpPr>
         <p:spPr>
           <a:xfrm>
-            <a:off x="502920" y="4782312"/>
+            <a:off x="502920" y="5221224"/>
             <a:ext cx="11183112" cy="512064"/>
           </a:xfrm>
           <a:prstGeom prst="rect">
@@ -9478,13 +9472,13 @@
       </p:sp>
       <p:sp>
         <p:nvSpPr>
-          <p:cNvPr id="17451" name="TextBox 17450"/>
+          <p:cNvPr id="17450" name="TextBox 17449"/>
           <p:cNvSpPr txBox="1"/>
           <p:nvPr/>
         </p:nvSpPr>
         <p:spPr>
           <a:xfrm>
-            <a:off x="713232" y="4901183"/>
+            <a:off x="713232" y="5340096"/>
             <a:ext cx="10762488" cy="292608"/>
           </a:xfrm>
           <a:prstGeom prst="rect">
@@ -9500,29 +9494,29 @@
           <a:p>
             <a:pPr>
               <a:lnSpc>
-                <a:spcPct val="112000"/>
+                <a:spcPct val="115000"/>
               </a:lnSpc>
               <a:spcAft>
                 <a:spcPts val="0"/>
               </a:spcAft>
             </a:pPr>
             <a:r>
-              <a:rPr sz="1000" b="1">
+              <a:rPr sz="1050" b="1">
                 <a:solidFill>
                   <a:srgbClr val="1A1A1A"/>
                 </a:solidFill>
                 <a:latin typeface="Calibri"/>
               </a:rPr>
-              <a:t>Working prototype:  </a:t>
-            </a:r>
-            <a:r>
-              <a:rPr sz="1000" b="0">
-                <a:solidFill>
-                  <a:srgbClr val="5F5F5F"/>
+              <a:t>This is not a plan.  </a:t>
+            </a:r>
+            <a:r>
+              <a:rPr sz="1050" b="0">
+                <a:solidFill>
+                  <a:srgbClr val="505050"/>
                 </a:solidFill>
                 <a:latin typeface="Calibri"/>
               </a:rPr>
-              <a:t>all five stages run today against the full 25,360 km network — the risk map on this deck's cover slide is a screenshot of the live application, not a mock-up.</a:t>
+              <a:t>All five stages run today against the real 25,360 km network we built - the map on the previous slide is a screenshot from it.</a:t>
             </a:r>
           </a:p>
         </p:txBody>
@@ -9908,7 +9902,7 @@
         <p:spPr>
           <a:xfrm>
             <a:off x="502920" y="1060704"/>
-            <a:ext cx="11155680" cy="237744"/>
+            <a:ext cx="11155680" cy="274320"/>
           </a:xfrm>
           <a:prstGeom prst="rect">
             <a:avLst/>
@@ -9923,20 +9917,20 @@
           <a:p>
             <a:pPr algn="l">
               <a:lnSpc>
-                <a:spcPct val="112000"/>
+                <a:spcPct val="115000"/>
               </a:lnSpc>
               <a:spcAft>
                 <a:spcPts val="0"/>
               </a:spcAft>
             </a:pPr>
             <a:r>
-              <a:rPr sz="1100" b="0" i="0">
+              <a:rPr sz="1150" b="0" i="0">
                 <a:solidFill>
                   <a:srgbClr val="1F4E79"/>
                 </a:solidFill>
                 <a:latin typeface="Calibri"/>
               </a:rPr>
-              <a:t>Already built on free data, with the gaps named plainly</a:t>
+              <a:t>What already works, and what we are upfront about</a:t>
             </a:r>
           </a:p>
         </p:txBody>
@@ -9950,7 +9944,7 @@
         <p:spPr>
           <a:xfrm>
             <a:off x="502920" y="1463040"/>
-            <a:ext cx="310896" cy="274320"/>
+            <a:ext cx="365760" cy="329184"/>
           </a:xfrm>
           <a:prstGeom prst="rect">
             <a:avLst/>
@@ -9992,7 +9986,7 @@
         <p:spPr>
           <a:xfrm>
             <a:off x="502920" y="1463040"/>
-            <a:ext cx="310896" cy="274320"/>
+            <a:ext cx="365760" cy="329184"/>
           </a:xfrm>
           <a:prstGeom prst="rect">
             <a:avLst/>
@@ -10014,7 +10008,7 @@
               </a:spcAft>
             </a:pPr>
             <a:r>
-              <a:rPr sz="950" b="1" i="0">
+              <a:rPr sz="1100" b="1" i="0">
                 <a:solidFill>
                   <a:srgbClr val="FFFFFF"/>
                 </a:solidFill>
@@ -10033,8 +10027,8 @@
         </p:nvSpPr>
         <p:spPr>
           <a:xfrm>
-            <a:off x="923544" y="1444752"/>
-            <a:ext cx="10762488" cy="310896"/>
+            <a:off x="978408" y="1463040"/>
+            <a:ext cx="10707624" cy="329184"/>
           </a:xfrm>
           <a:prstGeom prst="rect">
             <a:avLst/>
@@ -10056,7 +10050,7 @@
               </a:spcAft>
             </a:pPr>
             <a:r>
-              <a:rPr sz="1200" b="1" i="0">
+              <a:rPr sz="1300" b="1" i="0">
                 <a:solidFill>
                   <a:srgbClr val="1A1A1A"/>
                 </a:solidFill>
@@ -10075,8 +10069,8 @@
         </p:nvSpPr>
         <p:spPr>
           <a:xfrm>
-            <a:off x="502920" y="1810512"/>
-            <a:ext cx="3605784" cy="786384"/>
+            <a:off x="502920" y="1865376"/>
+            <a:ext cx="3605784" cy="841248"/>
           </a:xfrm>
           <a:prstGeom prst="rect">
             <a:avLst/>
@@ -10117,8 +10111,8 @@
         </p:nvSpPr>
         <p:spPr>
           <a:xfrm>
-            <a:off x="649224" y="1901952"/>
-            <a:ext cx="3313176" cy="603504"/>
+            <a:off x="649224" y="1965960"/>
+            <a:ext cx="3313176" cy="658368"/>
           </a:xfrm>
           <a:prstGeom prst="rect">
             <a:avLst/>
@@ -10133,14 +10127,14 @@
           <a:p>
             <a:pPr algn="l">
               <a:lnSpc>
-                <a:spcPct val="112000"/>
+                <a:spcPct val="115000"/>
               </a:lnSpc>
               <a:spcAft>
-                <a:spcPts val="200"/>
+                <a:spcPts val="300"/>
               </a:spcAft>
             </a:pPr>
             <a:r>
-              <a:rPr sz="1900" b="1" i="0">
+              <a:rPr sz="2000" b="1" i="0">
                 <a:solidFill>
                   <a:srgbClr val="1F4E79"/>
                 </a:solidFill>
@@ -10152,20 +10146,20 @@
           <a:p>
             <a:pPr algn="l">
               <a:lnSpc>
-                <a:spcPct val="105000"/>
+                <a:spcPct val="110000"/>
               </a:lnSpc>
               <a:spcAft>
                 <a:spcPts val="0"/>
               </a:spcAft>
             </a:pPr>
             <a:r>
-              <a:rPr sz="900" b="0" i="0">
-                <a:solidFill>
-                  <a:srgbClr val="5F5F5F"/>
+              <a:rPr sz="1000" b="0" i="0">
+                <a:solidFill>
+                  <a:srgbClr val="505050"/>
                 </a:solidFill>
                 <a:latin typeface="Calibri"/>
               </a:rPr>
-              <a:t>network already built, from open data</a:t>
+              <a:t>of road network we already built from open map data</a:t>
             </a:r>
           </a:p>
         </p:txBody>
@@ -10178,8 +10172,8 @@
         </p:nvSpPr>
         <p:spPr>
           <a:xfrm>
-            <a:off x="4291584" y="1810512"/>
-            <a:ext cx="3605784" cy="786384"/>
+            <a:off x="4291584" y="1865376"/>
+            <a:ext cx="3605784" cy="841248"/>
           </a:xfrm>
           <a:prstGeom prst="rect">
             <a:avLst/>
@@ -10220,8 +10214,8 @@
         </p:nvSpPr>
         <p:spPr>
           <a:xfrm>
-            <a:off x="4437888" y="1901952"/>
-            <a:ext cx="3313176" cy="603504"/>
+            <a:off x="4437888" y="1965960"/>
+            <a:ext cx="3313176" cy="658368"/>
           </a:xfrm>
           <a:prstGeom prst="rect">
             <a:avLst/>
@@ -10236,14 +10230,14 @@
           <a:p>
             <a:pPr algn="l">
               <a:lnSpc>
-                <a:spcPct val="112000"/>
+                <a:spcPct val="115000"/>
               </a:lnSpc>
               <a:spcAft>
-                <a:spcPts val="200"/>
+                <a:spcPts val="300"/>
               </a:spcAft>
             </a:pPr>
             <a:r>
-              <a:rPr sz="1900" b="1" i="0">
+              <a:rPr sz="2000" b="1" i="0">
                 <a:solidFill>
                   <a:srgbClr val="1F4E79"/>
                 </a:solidFill>
@@ -10255,20 +10249,20 @@
           <a:p>
             <a:pPr algn="l">
               <a:lnSpc>
-                <a:spcPct val="105000"/>
+                <a:spcPct val="110000"/>
               </a:lnSpc>
               <a:spcAft>
                 <a:spcPts val="0"/>
               </a:spcAft>
             </a:pPr>
             <a:r>
-              <a:rPr sz="900" b="0" i="0">
-                <a:solidFill>
-                  <a:srgbClr val="5F5F5F"/>
+              <a:rPr sz="1000" b="0" i="0">
+                <a:solidFill>
+                  <a:srgbClr val="505050"/>
                 </a:solidFill>
                 <a:latin typeface="Calibri"/>
               </a:rPr>
-              <a:t>recurring cost — every data source is free</a:t>
+              <a:t>spent on data - every source we use is free and public</a:t>
             </a:r>
           </a:p>
         </p:txBody>
@@ -10281,8 +10275,8 @@
         </p:nvSpPr>
         <p:spPr>
           <a:xfrm>
-            <a:off x="8080248" y="1810512"/>
-            <a:ext cx="3605784" cy="786384"/>
+            <a:off x="8080248" y="1865376"/>
+            <a:ext cx="3605784" cy="841248"/>
           </a:xfrm>
           <a:prstGeom prst="rect">
             <a:avLst/>
@@ -10323,8 +10317,8 @@
         </p:nvSpPr>
         <p:spPr>
           <a:xfrm>
-            <a:off x="8226552" y="1901952"/>
-            <a:ext cx="3313176" cy="603504"/>
+            <a:off x="8226552" y="1965960"/>
+            <a:ext cx="3313176" cy="658368"/>
           </a:xfrm>
           <a:prstGeom prst="rect">
             <a:avLst/>
@@ -10339,14 +10333,14 @@
           <a:p>
             <a:pPr algn="l">
               <a:lnSpc>
-                <a:spcPct val="112000"/>
+                <a:spcPct val="115000"/>
               </a:lnSpc>
               <a:spcAft>
-                <a:spcPts val="200"/>
+                <a:spcPts val="300"/>
               </a:spcAft>
             </a:pPr>
             <a:r>
-              <a:rPr sz="1900" b="1" i="0">
+              <a:rPr sz="2000" b="1" i="0">
                 <a:solidFill>
                   <a:srgbClr val="1F4E79"/>
                 </a:solidFill>
@@ -10358,20 +10352,20 @@
           <a:p>
             <a:pPr algn="l">
               <a:lnSpc>
-                <a:spcPct val="105000"/>
+                <a:spcPct val="110000"/>
               </a:lnSpc>
               <a:spcAft>
                 <a:spcPts val="0"/>
               </a:spcAft>
             </a:pPr>
             <a:r>
-              <a:rPr sz="900" b="0" i="0">
-                <a:solidFill>
-                  <a:srgbClr val="5F5F5F"/>
+              <a:rPr sz="1000" b="0" i="0">
+                <a:solidFill>
+                  <a:srgbClr val="505050"/>
                 </a:solidFill>
                 <a:latin typeface="Calibri"/>
               </a:rPr>
-              <a:t>automated tests and UI checks, passing</a:t>
+              <a:t>automated tests and browser checks, all passing today</a:t>
             </a:r>
           </a:p>
         </p:txBody>
@@ -10384,8 +10378,8 @@
         </p:nvSpPr>
         <p:spPr>
           <a:xfrm>
-            <a:off x="502920" y="2706624"/>
-            <a:ext cx="310896" cy="274320"/>
+            <a:off x="502920" y="2834640"/>
+            <a:ext cx="365760" cy="329184"/>
           </a:xfrm>
           <a:prstGeom prst="rect">
             <a:avLst/>
@@ -10426,8 +10420,8 @@
         </p:nvSpPr>
         <p:spPr>
           <a:xfrm>
-            <a:off x="502920" y="2706624"/>
-            <a:ext cx="310896" cy="274320"/>
+            <a:off x="502920" y="2834640"/>
+            <a:ext cx="365760" cy="329184"/>
           </a:xfrm>
           <a:prstGeom prst="rect">
             <a:avLst/>
@@ -10449,7 +10443,7 @@
               </a:spcAft>
             </a:pPr>
             <a:r>
-              <a:rPr sz="950" b="1" i="0">
+              <a:rPr sz="1100" b="1" i="0">
                 <a:solidFill>
                   <a:srgbClr val="FFFFFF"/>
                 </a:solidFill>
@@ -10468,8 +10462,8 @@
         </p:nvSpPr>
         <p:spPr>
           <a:xfrm>
-            <a:off x="923544" y="2688336"/>
-            <a:ext cx="5065776" cy="310896"/>
+            <a:off x="978408" y="2834640"/>
+            <a:ext cx="5010912" cy="329184"/>
           </a:xfrm>
           <a:prstGeom prst="rect">
             <a:avLst/>
@@ -10491,7 +10485,7 @@
               </a:spcAft>
             </a:pPr>
             <a:r>
-              <a:rPr sz="1200" b="1" i="0">
+              <a:rPr sz="1300" b="1" i="0">
                 <a:solidFill>
                   <a:srgbClr val="1A1A1A"/>
                 </a:solidFill>
@@ -10510,8 +10504,8 @@
         </p:nvSpPr>
         <p:spPr>
           <a:xfrm>
-            <a:off x="6172200" y="2706624"/>
-            <a:ext cx="310896" cy="274320"/>
+            <a:off x="6172200" y="2834640"/>
+            <a:ext cx="365760" cy="329184"/>
           </a:xfrm>
           <a:prstGeom prst="rect">
             <a:avLst/>
@@ -10552,8 +10546,8 @@
         </p:nvSpPr>
         <p:spPr>
           <a:xfrm>
-            <a:off x="6172200" y="2706624"/>
-            <a:ext cx="310896" cy="274320"/>
+            <a:off x="6172200" y="2834640"/>
+            <a:ext cx="365760" cy="329184"/>
           </a:xfrm>
           <a:prstGeom prst="rect">
             <a:avLst/>
@@ -10575,7 +10569,7 @@
               </a:spcAft>
             </a:pPr>
             <a:r>
-              <a:rPr sz="950" b="1" i="0">
+              <a:rPr sz="1100" b="1" i="0">
                 <a:solidFill>
                   <a:srgbClr val="FFFFFF"/>
                 </a:solidFill>
@@ -10594,8 +10588,8 @@
         </p:nvSpPr>
         <p:spPr>
           <a:xfrm>
-            <a:off x="6592824" y="2688336"/>
-            <a:ext cx="5065776" cy="310896"/>
+            <a:off x="6647688" y="2834640"/>
+            <a:ext cx="5010912" cy="329184"/>
           </a:xfrm>
           <a:prstGeom prst="rect">
             <a:avLst/>
@@ -10617,7 +10611,7 @@
               </a:spcAft>
             </a:pPr>
             <a:r>
-              <a:rPr sz="1200" b="1" i="0">
+              <a:rPr sz="1300" b="1" i="0">
                 <a:solidFill>
                   <a:srgbClr val="1A1A1A"/>
                 </a:solidFill>
@@ -10637,8 +10631,8 @@
           <p:nvPr/>
         </p:nvGraphicFramePr>
         <p:xfrm>
-          <a:off x="502920" y="3072384"/>
-          <a:ext cx="11183112" cy="2542032"/>
+          <a:off x="502920" y="3255264"/>
+          <a:ext cx="11183112" cy="2706624"/>
         </p:xfrm>
         <a:graphic>
           <a:graphicData uri="http://schemas.openxmlformats.org/drawingml/2006/table">
@@ -10650,7 +10644,7 @@
                 <a:gridCol w="5486400"/>
                 <a:gridCol w="5696712"/>
               </a:tblGrid>
-              <a:tr h="274320">
+              <a:tr h="292608">
                 <a:tc>
                   <a:txBody>
                     <a:bodyPr wrap="square"/>
@@ -10658,11 +10652,11 @@
                     <a:p>
                       <a:pPr algn="l">
                         <a:lnSpc>
-                          <a:spcPct val="105000"/>
+                          <a:spcPct val="108000"/>
                         </a:lnSpc>
                       </a:pPr>
                       <a:r>
-                        <a:rPr sz="950" b="1">
+                        <a:rPr sz="1050" b="1">
                           <a:solidFill>
                             <a:srgbClr val="1A1A1A"/>
                           </a:solidFill>
@@ -10672,7 +10666,7 @@
                       </a:r>
                     </a:p>
                   </a:txBody>
-                  <a:tcPr marL="73152" marR="73152" marT="18288" marB="18288" anchor="ctr">
+                  <a:tcPr marL="73152" marR="73152" marT="27432" marB="27432" anchor="ctr">
                     <a:solidFill>
                       <a:srgbClr val="F0F0F0"/>
                     </a:solidFill>
@@ -10685,11 +10679,11 @@
                     <a:p>
                       <a:pPr algn="l">
                         <a:lnSpc>
-                          <a:spcPct val="105000"/>
+                          <a:spcPct val="108000"/>
                         </a:lnSpc>
                       </a:pPr>
                       <a:r>
-                        <a:rPr sz="950" b="1">
+                        <a:rPr sz="1050" b="1">
                           <a:solidFill>
                             <a:srgbClr val="1A1A1A"/>
                           </a:solidFill>
@@ -10699,14 +10693,14 @@
                       </a:r>
                     </a:p>
                   </a:txBody>
-                  <a:tcPr marL="73152" marR="73152" marT="18288" marB="18288" anchor="ctr">
+                  <a:tcPr marL="73152" marR="73152" marT="27432" marB="27432" anchor="ctr">
                     <a:solidFill>
                       <a:srgbClr val="F0F0F0"/>
                     </a:solidFill>
                   </a:tcPr>
                 </a:tc>
               </a:tr>
-              <a:tr h="566928">
+              <a:tr h="603504">
                 <a:tc>
                   <a:txBody>
                     <a:bodyPr wrap="square"/>
@@ -10714,21 +10708,21 @@
                     <a:p>
                       <a:pPr algn="l">
                         <a:lnSpc>
-                          <a:spcPct val="105000"/>
+                          <a:spcPct val="108000"/>
                         </a:lnSpc>
                       </a:pPr>
                       <a:r>
-                        <a:rPr sz="1000" b="0">
+                        <a:rPr sz="1050" b="0">
                           <a:solidFill>
                             <a:srgbClr val="1A1A1A"/>
                           </a:solidFill>
                           <a:latin typeface="Calibri"/>
                         </a:rPr>
-                        <a:t>No live road-closure feed exists anywhere in India</a:t>
+                        <a:t>There is no official, live feed anywhere in India that says when a road is actually closed</a:t>
                       </a:r>
                     </a:p>
                   </a:txBody>
-                  <a:tcPr marL="73152" marR="73152" marT="18288" marB="18288" anchor="ctr">
+                  <a:tcPr marL="73152" marR="73152" marT="27432" marB="27432" anchor="ctr">
                     <a:solidFill>
                       <a:srgbClr val="FFFFFF"/>
                     </a:solidFill>
@@ -10741,28 +10735,28 @@
                     <a:p>
                       <a:pPr algn="l">
                         <a:lnSpc>
-                          <a:spcPct val="105000"/>
+                          <a:spcPct val="108000"/>
                         </a:lnSpc>
                       </a:pPr>
                       <a:r>
-                        <a:rPr sz="1000" b="0">
+                        <a:rPr sz="1050" b="0">
                           <a:solidFill>
                             <a:srgbClr val="1A1A1A"/>
                           </a:solidFill>
                           <a:latin typeface="Calibri"/>
                         </a:rPr>
-                        <a:t>Predict from rainfall + terrain now; collect driver-reported closures in-app to learn over time</a:t>
+                        <a:t>So we predict risk from rainfall and terrain for now, and the app is being designed to also take reports from drivers directly</a:t>
                       </a:r>
                     </a:p>
                   </a:txBody>
-                  <a:tcPr marL="73152" marR="73152" marT="18288" marB="18288" anchor="ctr">
+                  <a:tcPr marL="73152" marR="73152" marT="27432" marB="27432" anchor="ctr">
                     <a:solidFill>
                       <a:srgbClr val="FFFFFF"/>
                     </a:solidFill>
                   </a:tcPr>
                 </a:tc>
               </a:tr>
-              <a:tr h="566928">
+              <a:tr h="603504">
                 <a:tc>
                   <a:txBody>
                     <a:bodyPr wrap="square"/>
@@ -10770,21 +10764,21 @@
                     <a:p>
                       <a:pPr algn="l">
                         <a:lnSpc>
-                          <a:spcPct val="105000"/>
+                          <a:spcPct val="108000"/>
                         </a:lnSpc>
                       </a:pPr>
                       <a:r>
-                        <a:rPr sz="1000" b="0">
+                        <a:rPr sz="1050" b="0">
                           <a:solidFill>
                             <a:srgbClr val="1A1A1A"/>
                           </a:solidFill>
                           <a:latin typeface="Calibri"/>
                         </a:rPr>
-                        <a:t>OpenStreetMap has population for only 15% of villages</a:t>
+                        <a:t>OpenStreetMap has population numbers for only about 15% of villages in the region</a:t>
                       </a:r>
                     </a:p>
                   </a:txBody>
-                  <a:tcPr marL="73152" marR="73152" marT="18288" marB="18288" anchor="ctr">
+                  <a:tcPr marL="73152" marR="73152" marT="27432" marB="27432" anchor="ctr">
                     <a:solidFill>
                       <a:srgbClr val="FFFFFF"/>
                     </a:solidFill>
@@ -10797,28 +10791,28 @@
                     <a:p>
                       <a:pPr algn="l">
                         <a:lnSpc>
-                          <a:spcPct val="105000"/>
+                          <a:spcPct val="108000"/>
                         </a:lnSpc>
                       </a:pPr>
                       <a:r>
-                        <a:rPr sz="1000" b="0">
+                        <a:rPr sz="1050" b="0">
                           <a:solidFill>
                             <a:srgbClr val="1A1A1A"/>
                           </a:solidFill>
                           <a:latin typeface="Calibri"/>
                         </a:rPr>
-                        <a:t>Rank facility siting by settlements reached, not population; add the Census 2011 directory next</a:t>
+                        <a:t>We rank villages by how many other places they help connect, not population, and plan to add the Census 2011 directory next</a:t>
                       </a:r>
                     </a:p>
                   </a:txBody>
-                  <a:tcPr marL="73152" marR="73152" marT="18288" marB="18288" anchor="ctr">
+                  <a:tcPr marL="73152" marR="73152" marT="27432" marB="27432" anchor="ctr">
                     <a:solidFill>
                       <a:srgbClr val="FFFFFF"/>
                     </a:solidFill>
                   </a:tcPr>
                 </a:tc>
               </a:tr>
-              <a:tr h="566928">
+              <a:tr h="603504">
                 <a:tc>
                   <a:txBody>
                     <a:bodyPr wrap="square"/>
@@ -10826,21 +10820,21 @@
                     <a:p>
                       <a:pPr algn="l">
                         <a:lnSpc>
-                          <a:spcPct val="105000"/>
+                          <a:spcPct val="108000"/>
                         </a:lnSpc>
                       </a:pPr>
                       <a:r>
-                        <a:rPr sz="1000" b="0">
+                        <a:rPr sz="1050" b="0">
                           <a:solidFill>
                             <a:srgbClr val="1A1A1A"/>
                           </a:solidFill>
                           <a:latin typeface="Calibri"/>
                         </a:rPr>
-                        <a:t>Only 35 markets are mapped for 5,594 villages</a:t>
+                        <a:t>Only 35 markets are mapped for all 5,594 villages we track</a:t>
                       </a:r>
                     </a:p>
                   </a:txBody>
-                  <a:tcPr marL="73152" marR="73152" marT="18288" marB="18288" anchor="ctr">
+                  <a:tcPr marL="73152" marR="73152" marT="27432" marB="27432" anchor="ctr">
                     <a:solidFill>
                       <a:srgbClr val="FFFFFF"/>
                     </a:solidFill>
@@ -10853,28 +10847,28 @@
                     <a:p>
                       <a:pPr algn="l">
                         <a:lnSpc>
-                          <a:spcPct val="105000"/>
+                          <a:spcPct val="108000"/>
                         </a:lnSpc>
                       </a:pPr>
                       <a:r>
-                        <a:rPr sz="1000" b="0">
+                        <a:rPr sz="1050" b="0">
                           <a:solidFill>
                             <a:srgbClr val="1A1A1A"/>
                           </a:solidFill>
                           <a:latin typeface="Calibri"/>
                         </a:rPr>
-                        <a:t>Load the Agmarknet market list — the single highest-value data addition identified</a:t>
+                        <a:t>Loading the Agmarknet market list is the very next thing we plan to do - it is the single biggest gap right now</a:t>
                       </a:r>
                     </a:p>
                   </a:txBody>
-                  <a:tcPr marL="73152" marR="73152" marT="18288" marB="18288" anchor="ctr">
+                  <a:tcPr marL="73152" marR="73152" marT="27432" marB="27432" anchor="ctr">
                     <a:solidFill>
                       <a:srgbClr val="FFFFFF"/>
                     </a:solidFill>
                   </a:tcPr>
                 </a:tc>
               </a:tr>
-              <a:tr h="566928">
+              <a:tr h="603504">
                 <a:tc>
                   <a:txBody>
                     <a:bodyPr wrap="square"/>
@@ -10882,21 +10876,21 @@
                     <a:p>
                       <a:pPr algn="l">
                         <a:lnSpc>
-                          <a:spcPct val="105000"/>
+                          <a:spcPct val="108000"/>
                         </a:lnSpc>
                       </a:pPr>
                       <a:r>
-                        <a:rPr sz="1000" b="0">
+                        <a:rPr sz="1050" b="0">
                           <a:solidFill>
                             <a:srgbClr val="1A1A1A"/>
                           </a:solidFill>
                           <a:latin typeface="Calibri"/>
                         </a:rPr>
-                        <a:t>Free map and elevation APIs rate-limit large downloads</a:t>
+                        <a:t>The free map and elevation services we use limit how much can be downloaded at once</a:t>
                       </a:r>
                     </a:p>
                   </a:txBody>
-                  <a:tcPr marL="73152" marR="73152" marT="18288" marB="18288" anchor="ctr">
+                  <a:tcPr marL="73152" marR="73152" marT="27432" marB="27432" anchor="ctr">
                     <a:solidFill>
                       <a:srgbClr val="FFFFFF"/>
                     </a:solidFill>
@@ -10909,21 +10903,21 @@
                     <a:p>
                       <a:pPr algn="l">
                         <a:lnSpc>
-                          <a:spcPct val="105000"/>
+                          <a:spcPct val="108000"/>
                         </a:lnSpc>
                       </a:pPr>
                       <a:r>
-                        <a:rPr sz="1000" b="0">
+                        <a:rPr sz="1050" b="0">
                           <a:solidFill>
                             <a:srgbClr val="1A1A1A"/>
                           </a:solidFill>
                           <a:latin typeface="Calibri"/>
                         </a:rPr>
-                        <a:t>Offline-first pipeline: fetch once, build once, commit the result — nothing at runtime re-downloads</a:t>
+                        <a:t>We download once, build the network offline, and save the result - so the app itself never depends on those services being up</a:t>
                       </a:r>
                     </a:p>
                   </a:txBody>
-                  <a:tcPr marL="73152" marR="73152" marT="18288" marB="18288" anchor="ctr">
+                  <a:tcPr marL="73152" marR="73152" marT="27432" marB="27432" anchor="ctr">
                     <a:solidFill>
                       <a:srgbClr val="FFFFFF"/>
                     </a:solidFill>
@@ -11320,7 +11314,7 @@
         <p:spPr>
           <a:xfrm>
             <a:off x="502920" y="1060704"/>
-            <a:ext cx="11155680" cy="237744"/>
+            <a:ext cx="11155680" cy="274320"/>
           </a:xfrm>
           <a:prstGeom prst="rect">
             <a:avLst/>
@@ -11335,20 +11329,20 @@
           <a:p>
             <a:pPr algn="l">
               <a:lnSpc>
-                <a:spcPct val="112000"/>
+                <a:spcPct val="115000"/>
               </a:lnSpc>
               <a:spcAft>
                 <a:spcPts val="0"/>
               </a:spcAft>
             </a:pPr>
             <a:r>
-              <a:rPr sz="1100" b="0" i="0">
+              <a:rPr sz="1150" b="0" i="0">
                 <a:solidFill>
                   <a:srgbClr val="1F4E79"/>
                 </a:solidFill>
                 <a:latin typeface="Calibri"/>
               </a:rPr>
-              <a:t>Who this changes things for, and how</a:t>
+              <a:t>Who this helps, and why it matters</a:t>
             </a:r>
           </a:p>
         </p:txBody>
@@ -11362,7 +11356,7 @@
         <p:spPr>
           <a:xfrm>
             <a:off x="502920" y="1463040"/>
-            <a:ext cx="310896" cy="274320"/>
+            <a:ext cx="365760" cy="329184"/>
           </a:xfrm>
           <a:prstGeom prst="rect">
             <a:avLst/>
@@ -11404,7 +11398,7 @@
         <p:spPr>
           <a:xfrm>
             <a:off x="502920" y="1463040"/>
-            <a:ext cx="310896" cy="274320"/>
+            <a:ext cx="365760" cy="329184"/>
           </a:xfrm>
           <a:prstGeom prst="rect">
             <a:avLst/>
@@ -11426,7 +11420,7 @@
               </a:spcAft>
             </a:pPr>
             <a:r>
-              <a:rPr sz="950" b="1" i="0">
+              <a:rPr sz="1100" b="1" i="0">
                 <a:solidFill>
                   <a:srgbClr val="FFFFFF"/>
                 </a:solidFill>
@@ -11445,8 +11439,8 @@
         </p:nvSpPr>
         <p:spPr>
           <a:xfrm>
-            <a:off x="923544" y="1444752"/>
-            <a:ext cx="10762488" cy="310896"/>
+            <a:off x="978408" y="1463040"/>
+            <a:ext cx="10707624" cy="329184"/>
           </a:xfrm>
           <a:prstGeom prst="rect">
             <a:avLst/>
@@ -11468,7 +11462,7 @@
               </a:spcAft>
             </a:pPr>
             <a:r>
-              <a:rPr sz="1200" b="1" i="0">
+              <a:rPr sz="1300" b="1" i="0">
                 <a:solidFill>
                   <a:srgbClr val="1A1A1A"/>
                 </a:solidFill>
@@ -11487,8 +11481,8 @@
         </p:nvSpPr>
         <p:spPr>
           <a:xfrm>
-            <a:off x="502920" y="1810512"/>
-            <a:ext cx="3605784" cy="1417320"/>
+            <a:off x="502920" y="1865376"/>
+            <a:ext cx="3605784" cy="1481328"/>
           </a:xfrm>
           <a:prstGeom prst="rect">
             <a:avLst/>
@@ -11529,8 +11523,8 @@
         </p:nvSpPr>
         <p:spPr>
           <a:xfrm>
-            <a:off x="667512" y="1920240"/>
-            <a:ext cx="3276600" cy="1234440"/>
+            <a:off x="667512" y="1975104"/>
+            <a:ext cx="3276600" cy="1298448"/>
           </a:xfrm>
           <a:prstGeom prst="rect">
             <a:avLst/>
@@ -11542,42 +11536,42 @@
             <a:spAutoFit/>
           </a:bodyPr>
           <a:lstStyle/>
-          <a:p>
-            <a:pPr algn="l">
-              <a:lnSpc>
-                <a:spcPct val="112000"/>
-              </a:lnSpc>
-              <a:spcAft>
-                <a:spcPts val="500"/>
-              </a:spcAft>
-            </a:pPr>
-            <a:r>
-              <a:rPr sz="1100" b="1" i="0">
-                <a:solidFill>
-                  <a:srgbClr val="1A1A1A"/>
-                </a:solidFill>
-                <a:latin typeface="Calibri"/>
-              </a:rPr>
-              <a:t>Farmers &amp; FPOs</a:t>
-            </a:r>
-          </a:p>
           <a:p>
             <a:pPr algn="l">
               <a:lnSpc>
                 <a:spcPct val="115000"/>
               </a:lnSpc>
               <a:spcAft>
+                <a:spcPts val="600"/>
+              </a:spcAft>
+            </a:pPr>
+            <a:r>
+              <a:rPr sz="1200" b="1" i="0">
+                <a:solidFill>
+                  <a:srgbClr val="1A1A1A"/>
+                </a:solidFill>
+                <a:latin typeface="Calibri"/>
+              </a:rPr>
+              <a:t>Farmers and FPOs</a:t>
+            </a:r>
+          </a:p>
+          <a:p>
+            <a:pPr algn="l">
+              <a:lnSpc>
+                <a:spcPct val="118000"/>
+              </a:lnSpc>
+              <a:spcAft>
                 <a:spcPts val="0"/>
               </a:spcAft>
             </a:pPr>
             <a:r>
-              <a:rPr sz="950" b="0" i="0">
-                <a:solidFill>
-                  <a:srgbClr val="5F5F5F"/>
+              <a:rPr sz="1050" b="0" i="0">
+                <a:solidFill>
+                  <a:srgbClr val="505050"/>
                 </a:solidFill>
                 <a:latin typeface="Calibri"/>
               </a:rPr>
-              <a:t>Billbari, Assam: 1.3 days to a market in the monsoon. Knowing that before harvest changes what to plant, and when to sell.</a:t>
+              <a:t>In Billbari, Assam, reaching a market takes 1.3 days in the monsoon. Knowing that ahead of time changes what a farmer plants and when they sell it.</a:t>
             </a:r>
           </a:p>
         </p:txBody>
@@ -11590,8 +11584,8 @@
         </p:nvSpPr>
         <p:spPr>
           <a:xfrm>
-            <a:off x="4291584" y="1810512"/>
-            <a:ext cx="3605784" cy="1417320"/>
+            <a:off x="4291584" y="1865376"/>
+            <a:ext cx="3605784" cy="1481328"/>
           </a:xfrm>
           <a:prstGeom prst="rect">
             <a:avLst/>
@@ -11632,8 +11626,8 @@
         </p:nvSpPr>
         <p:spPr>
           <a:xfrm>
-            <a:off x="4456176" y="1920240"/>
-            <a:ext cx="3276600" cy="1234440"/>
+            <a:off x="4456176" y="1975104"/>
+            <a:ext cx="3276600" cy="1298448"/>
           </a:xfrm>
           <a:prstGeom prst="rect">
             <a:avLst/>
@@ -11645,42 +11639,42 @@
             <a:spAutoFit/>
           </a:bodyPr>
           <a:lstStyle/>
-          <a:p>
-            <a:pPr algn="l">
-              <a:lnSpc>
-                <a:spcPct val="112000"/>
-              </a:lnSpc>
-              <a:spcAft>
-                <a:spcPts val="500"/>
-              </a:spcAft>
-            </a:pPr>
-            <a:r>
-              <a:rPr sz="1100" b="1" i="0">
-                <a:solidFill>
-                  <a:srgbClr val="1A1A1A"/>
-                </a:solidFill>
-                <a:latin typeface="Calibri"/>
-              </a:rPr>
-              <a:t>Transporters &amp; 3PLs</a:t>
-            </a:r>
-          </a:p>
           <a:p>
             <a:pPr algn="l">
               <a:lnSpc>
                 <a:spcPct val="115000"/>
               </a:lnSpc>
               <a:spcAft>
+                <a:spcPts val="600"/>
+              </a:spcAft>
+            </a:pPr>
+            <a:r>
+              <a:rPr sz="1200" b="1" i="0">
+                <a:solidFill>
+                  <a:srgbClr val="1A1A1A"/>
+                </a:solidFill>
+                <a:latin typeface="Calibri"/>
+              </a:rPr>
+              <a:t>Transporters and 3PLs</a:t>
+            </a:r>
+          </a:p>
+          <a:p>
+            <a:pPr algn="l">
+              <a:lnSpc>
+                <a:spcPct val="118000"/>
+              </a:lnSpc>
+              <a:spcAft>
                 <a:spcPts val="0"/>
               </a:spcAft>
             </a:pPr>
             <a:r>
-              <a:rPr sz="950" b="0" i="0">
-                <a:solidFill>
-                  <a:srgbClr val="5F5F5F"/>
+              <a:rPr sz="1050" b="0" i="0">
+                <a:solidFill>
+                  <a:srgbClr val="505050"/>
                 </a:solidFill>
                 <a:latin typeface="Calibri"/>
               </a:rPr>
-              <a:t>A defensible mode choice per consignment, backed by real rupees, hours and risk — not a rate card and a guess.</a:t>
+              <a:t>Instead of guessing which route to take, they get a real comparison of cost, time and risk for every option available.</a:t>
             </a:r>
           </a:p>
         </p:txBody>
@@ -11693,8 +11687,8 @@
         </p:nvSpPr>
         <p:spPr>
           <a:xfrm>
-            <a:off x="8080248" y="1810512"/>
-            <a:ext cx="3605784" cy="1417320"/>
+            <a:off x="8080248" y="1865376"/>
+            <a:ext cx="3605784" cy="1481328"/>
           </a:xfrm>
           <a:prstGeom prst="rect">
             <a:avLst/>
@@ -11735,8 +11729,8 @@
         </p:nvSpPr>
         <p:spPr>
           <a:xfrm>
-            <a:off x="8244840" y="1920240"/>
-            <a:ext cx="3276600" cy="1234440"/>
+            <a:off x="8244840" y="1975104"/>
+            <a:ext cx="3276600" cy="1298448"/>
           </a:xfrm>
           <a:prstGeom prst="rect">
             <a:avLst/>
@@ -11748,42 +11742,42 @@
             <a:spAutoFit/>
           </a:bodyPr>
           <a:lstStyle/>
-          <a:p>
-            <a:pPr algn="l">
-              <a:lnSpc>
-                <a:spcPct val="112000"/>
-              </a:lnSpc>
-              <a:spcAft>
-                <a:spcPts val="500"/>
-              </a:spcAft>
-            </a:pPr>
-            <a:r>
-              <a:rPr sz="1100" b="1" i="0">
-                <a:solidFill>
-                  <a:srgbClr val="1A1A1A"/>
-                </a:solidFill>
-                <a:latin typeface="Calibri"/>
-              </a:rPr>
-              <a:t>MDoNER, NEC &amp; State PWDs</a:t>
-            </a:r>
-          </a:p>
           <a:p>
             <a:pPr algn="l">
               <a:lnSpc>
                 <a:spcPct val="115000"/>
               </a:lnSpc>
               <a:spcAft>
+                <a:spcPts val="600"/>
+              </a:spcAft>
+            </a:pPr>
+            <a:r>
+              <a:rPr sz="1200" b="1" i="0">
+                <a:solidFill>
+                  <a:srgbClr val="1A1A1A"/>
+                </a:solidFill>
+                <a:latin typeface="Calibri"/>
+              </a:rPr>
+              <a:t>MDoNER, NEC and State PWDs</a:t>
+            </a:r>
+          </a:p>
+          <a:p>
+            <a:pPr algn="l">
+              <a:lnSpc>
+                <a:spcPct val="118000"/>
+              </a:lnSpc>
+              <a:spcAft>
                 <a:spcPts val="0"/>
               </a:spcAft>
             </a:pPr>
             <a:r>
-              <a:rPr sz="950" b="0" i="0">
-                <a:solidFill>
-                  <a:srgbClr val="5F5F5F"/>
+              <a:rPr sz="1050" b="0" i="0">
+                <a:solidFill>
+                  <a:srgbClr val="505050"/>
                 </a:solidFill>
                 <a:latin typeface="Calibri"/>
               </a:rPr>
-              <a:t>In July, 1,309 of 4,033 major roads are at severe risk — and on 1,055 of them the cause is flooding, not landslides. Spend accordingly.</a:t>
+              <a:t>In July, 1,309 of 4,033 major roads are at serious risk, and on 1,055 of them the real problem is flooding, not landslides - so money goes to the right fix.</a:t>
             </a:r>
           </a:p>
         </p:txBody>
@@ -11796,8 +11790,8 @@
         </p:nvSpPr>
         <p:spPr>
           <a:xfrm>
-            <a:off x="502920" y="3429000"/>
-            <a:ext cx="310896" cy="274320"/>
+            <a:off x="502920" y="3520440"/>
+            <a:ext cx="365760" cy="329184"/>
           </a:xfrm>
           <a:prstGeom prst="rect">
             <a:avLst/>
@@ -11838,8 +11832,8 @@
         </p:nvSpPr>
         <p:spPr>
           <a:xfrm>
-            <a:off x="502920" y="3429000"/>
-            <a:ext cx="310896" cy="274320"/>
+            <a:off x="502920" y="3520440"/>
+            <a:ext cx="365760" cy="329184"/>
           </a:xfrm>
           <a:prstGeom prst="rect">
             <a:avLst/>
@@ -11861,7 +11855,7 @@
               </a:spcAft>
             </a:pPr>
             <a:r>
-              <a:rPr sz="950" b="1" i="0">
+              <a:rPr sz="1100" b="1" i="0">
                 <a:solidFill>
                   <a:srgbClr val="FFFFFF"/>
                 </a:solidFill>
@@ -11880,8 +11874,8 @@
         </p:nvSpPr>
         <p:spPr>
           <a:xfrm>
-            <a:off x="923544" y="3410712"/>
-            <a:ext cx="10762488" cy="310896"/>
+            <a:off x="978408" y="3493008"/>
+            <a:ext cx="10707624" cy="502920"/>
           </a:xfrm>
           <a:prstGeom prst="rect">
             <a:avLst/>
@@ -11889,10 +11883,29 @@
           <a:noFill/>
         </p:spPr>
         <p:txBody>
-          <a:bodyPr wrap="square" lIns="0" rIns="0" tIns="0" bIns="0" anchor="ctr">
+          <a:bodyPr wrap="square" lIns="0" rIns="0" tIns="0" bIns="0" anchor="t">
             <a:spAutoFit/>
           </a:bodyPr>
           <a:lstStyle/>
+          <a:p>
+            <a:pPr algn="l">
+              <a:lnSpc>
+                <a:spcPct val="100000"/>
+              </a:lnSpc>
+              <a:spcAft>
+                <a:spcPts val="100"/>
+              </a:spcAft>
+            </a:pPr>
+            <a:r>
+              <a:rPr sz="1300" b="1" i="0">
+                <a:solidFill>
+                  <a:srgbClr val="1A1A1A"/>
+                </a:solidFill>
+                <a:latin typeface="Calibri"/>
+              </a:rPr>
+              <a:t>Benefits of the solution</a:t>
+            </a:r>
+          </a:p>
           <a:p>
             <a:pPr algn="l">
               <a:lnSpc>
@@ -11903,13 +11916,13 @@
               </a:spcAft>
             </a:pPr>
             <a:r>
-              <a:rPr sz="1200" b="1" i="0">
-                <a:solidFill>
-                  <a:srgbClr val="1A1A1A"/>
+              <a:rPr sz="1000" b="0" i="1">
+                <a:solidFill>
+                  <a:srgbClr val="505050"/>
                 </a:solidFill>
                 <a:latin typeface="Calibri"/>
               </a:rPr>
-              <a:t>Benefits of the solution (social, economic, environmental)</a:t>
+              <a:t>(social, economic, environmental, etc.)</a:t>
             </a:r>
           </a:p>
         </p:txBody>
@@ -11922,8 +11935,8 @@
         </p:nvSpPr>
         <p:spPr>
           <a:xfrm>
-            <a:off x="502920" y="3776472"/>
-            <a:ext cx="3605784" cy="1417320"/>
+            <a:off x="502920" y="4087368"/>
+            <a:ext cx="3605784" cy="1280160"/>
           </a:xfrm>
           <a:prstGeom prst="rect">
             <a:avLst/>
@@ -11966,8 +11979,8 @@
         </p:nvSpPr>
         <p:spPr>
           <a:xfrm>
-            <a:off x="667512" y="3886200"/>
-            <a:ext cx="3276600" cy="1234440"/>
+            <a:off x="667512" y="4215383"/>
+            <a:ext cx="3276600" cy="1060704"/>
           </a:xfrm>
           <a:prstGeom prst="rect">
             <a:avLst/>
@@ -11979,42 +11992,42 @@
             <a:spAutoFit/>
           </a:bodyPr>
           <a:lstStyle/>
-          <a:p>
-            <a:pPr algn="l">
-              <a:lnSpc>
-                <a:spcPct val="112000"/>
-              </a:lnSpc>
-              <a:spcAft>
-                <a:spcPts val="500"/>
-              </a:spcAft>
-            </a:pPr>
-            <a:r>
-              <a:rPr sz="1000" b="1" i="0">
-                <a:solidFill>
-                  <a:srgbClr val="1F4E79"/>
-                </a:solidFill>
-                <a:latin typeface="Calibri"/>
-              </a:rPr>
-              <a:t>SOCIAL</a:t>
-            </a:r>
-          </a:p>
           <a:p>
             <a:pPr algn="l">
               <a:lnSpc>
                 <a:spcPct val="115000"/>
               </a:lnSpc>
               <a:spcAft>
+                <a:spcPts val="600"/>
+              </a:spcAft>
+            </a:pPr>
+            <a:r>
+              <a:rPr sz="1050" b="1" i="0">
+                <a:solidFill>
+                  <a:srgbClr val="1F4E79"/>
+                </a:solidFill>
+                <a:latin typeface="Calibri"/>
+              </a:rPr>
+              <a:t>SOCIAL</a:t>
+            </a:r>
+          </a:p>
+          <a:p>
+            <a:pPr algn="l">
+              <a:lnSpc>
+                <a:spcPct val="118000"/>
+              </a:lnSpc>
+              <a:spcAft>
                 <a:spcPts val="0"/>
               </a:spcAft>
             </a:pPr>
             <a:r>
-              <a:rPr sz="950" b="0" i="0">
-                <a:solidFill>
-                  <a:srgbClr val="5F5F5F"/>
+              <a:rPr sz="1050" b="0" i="0">
+                <a:solidFill>
+                  <a:srgbClr val="505050"/>
                 </a:solidFill>
                 <a:latin typeface="Calibri"/>
               </a:rPr>
-              <a:t>Visibility for the 399 settlements more than 20 km from any mapped road — invisible to planning until they are measured.</a:t>
+              <a:t>399 villages more than 20 km from any mapped road finally show up in the data, instead of being invisible to planners.</a:t>
             </a:r>
           </a:p>
         </p:txBody>
@@ -12027,8 +12040,8 @@
         </p:nvSpPr>
         <p:spPr>
           <a:xfrm>
-            <a:off x="4291584" y="3776472"/>
-            <a:ext cx="3605784" cy="1417320"/>
+            <a:off x="4291584" y="4087368"/>
+            <a:ext cx="3605784" cy="1280160"/>
           </a:xfrm>
           <a:prstGeom prst="rect">
             <a:avLst/>
@@ -12071,8 +12084,8 @@
         </p:nvSpPr>
         <p:spPr>
           <a:xfrm>
-            <a:off x="4456176" y="3886200"/>
-            <a:ext cx="3276600" cy="1234440"/>
+            <a:off x="4456176" y="4215383"/>
+            <a:ext cx="3276600" cy="1060704"/>
           </a:xfrm>
           <a:prstGeom prst="rect">
             <a:avLst/>
@@ -12084,42 +12097,42 @@
             <a:spAutoFit/>
           </a:bodyPr>
           <a:lstStyle/>
-          <a:p>
-            <a:pPr algn="l">
-              <a:lnSpc>
-                <a:spcPct val="112000"/>
-              </a:lnSpc>
-              <a:spcAft>
-                <a:spcPts val="500"/>
-              </a:spcAft>
-            </a:pPr>
-            <a:r>
-              <a:rPr sz="1000" b="1" i="0">
-                <a:solidFill>
-                  <a:srgbClr val="1F4E79"/>
-                </a:solidFill>
-                <a:latin typeface="Calibri"/>
-              </a:rPr>
-              <a:t>ECONOMIC</a:t>
-            </a:r>
-          </a:p>
           <a:p>
             <a:pPr algn="l">
               <a:lnSpc>
                 <a:spcPct val="115000"/>
               </a:lnSpc>
               <a:spcAft>
+                <a:spcPts val="600"/>
+              </a:spcAft>
+            </a:pPr>
+            <a:r>
+              <a:rPr sz="1050" b="1" i="0">
+                <a:solidFill>
+                  <a:srgbClr val="1F4E79"/>
+                </a:solidFill>
+                <a:latin typeface="Calibri"/>
+              </a:rPr>
+              <a:t>ECONOMIC</a:t>
+            </a:r>
+          </a:p>
+          <a:p>
+            <a:pPr algn="l">
+              <a:lnSpc>
+                <a:spcPct val="118000"/>
+              </a:lnSpc>
+              <a:spcAft>
                 <a:spcPts val="0"/>
               </a:spcAft>
             </a:pPr>
             <a:r>
-              <a:rPr sz="950" b="0" i="0">
-                <a:solidFill>
-                  <a:srgbClr val="5F5F5F"/>
+              <a:rPr sz="1050" b="0" i="0">
+                <a:solidFill>
+                  <a:srgbClr val="505050"/>
                 </a:solidFill>
                 <a:latin typeface="Calibri"/>
               </a:rPr>
-              <a:t>₹5,032 per tonne and 6.2 days separate the best and worst choice on one lane alone — the cost of choosing badly, made visible.</a:t>
+              <a:t>On a single route, the best and worst choice differ by ₹5,032 a tonne and 6.2 days - money currently lost to guesswork.</a:t>
             </a:r>
           </a:p>
         </p:txBody>
@@ -12132,8 +12145,8 @@
         </p:nvSpPr>
         <p:spPr>
           <a:xfrm>
-            <a:off x="8080248" y="3776472"/>
-            <a:ext cx="3605784" cy="1417320"/>
+            <a:off x="8080248" y="4087368"/>
+            <a:ext cx="3605784" cy="1280160"/>
           </a:xfrm>
           <a:prstGeom prst="rect">
             <a:avLst/>
@@ -12176,8 +12189,8 @@
         </p:nvSpPr>
         <p:spPr>
           <a:xfrm>
-            <a:off x="8244840" y="3886200"/>
-            <a:ext cx="3276600" cy="1234440"/>
+            <a:off x="8244840" y="4215383"/>
+            <a:ext cx="3276600" cy="1060704"/>
           </a:xfrm>
           <a:prstGeom prst="rect">
             <a:avLst/>
@@ -12189,42 +12202,42 @@
             <a:spAutoFit/>
           </a:bodyPr>
           <a:lstStyle/>
-          <a:p>
-            <a:pPr algn="l">
-              <a:lnSpc>
-                <a:spcPct val="112000"/>
-              </a:lnSpc>
-              <a:spcAft>
-                <a:spcPts val="500"/>
-              </a:spcAft>
-            </a:pPr>
-            <a:r>
-              <a:rPr sz="1000" b="1" i="0">
-                <a:solidFill>
-                  <a:srgbClr val="1F4E79"/>
-                </a:solidFill>
-                <a:latin typeface="Calibri"/>
-              </a:rPr>
-              <a:t>ENVIRONMENTAL</a:t>
-            </a:r>
-          </a:p>
           <a:p>
             <a:pPr algn="l">
               <a:lnSpc>
                 <a:spcPct val="115000"/>
               </a:lnSpc>
               <a:spcAft>
+                <a:spcPts val="600"/>
+              </a:spcAft>
+            </a:pPr>
+            <a:r>
+              <a:rPr sz="1050" b="1" i="0">
+                <a:solidFill>
+                  <a:srgbClr val="1F4E79"/>
+                </a:solidFill>
+                <a:latin typeface="Calibri"/>
+              </a:rPr>
+              <a:t>ENVIRONMENTAL</a:t>
+            </a:r>
+          </a:p>
+          <a:p>
+            <a:pPr algn="l">
+              <a:lnSpc>
+                <a:spcPct val="118000"/>
+              </a:lnSpc>
+              <a:spcAft>
                 <a:spcPts val="0"/>
               </a:spcAft>
             </a:pPr>
             <a:r>
-              <a:rPr sz="950" b="0" i="0">
-                <a:solidFill>
-                  <a:srgbClr val="5F5F5F"/>
+              <a:rPr sz="1050" b="0" i="0">
+                <a:solidFill>
+                  <a:srgbClr val="505050"/>
                 </a:solidFill>
                 <a:latin typeface="Calibri"/>
               </a:rPr>
-              <a:t>Routes shift to rail and waterway where viable: 2.0 days by rail vs 7.6 days by road only, on the same lane.</a:t>
+              <a:t>Where rail or water transport works out better, the app recommends it - cutting road-only trips that take nearly four times as long.</a:t>
             </a:r>
           </a:p>
         </p:txBody>
@@ -12615,7 +12628,7 @@
         <p:spPr>
           <a:xfrm>
             <a:off x="502920" y="1060704"/>
-            <a:ext cx="11155680" cy="237744"/>
+            <a:ext cx="11155680" cy="274320"/>
           </a:xfrm>
           <a:prstGeom prst="rect">
             <a:avLst/>
@@ -12630,14 +12643,14 @@
           <a:p>
             <a:pPr algn="l">
               <a:lnSpc>
-                <a:spcPct val="112000"/>
+                <a:spcPct val="115000"/>
               </a:lnSpc>
               <a:spcAft>
                 <a:spcPts val="0"/>
               </a:spcAft>
             </a:pPr>
             <a:r>
-              <a:rPr sz="1100" b="0" i="0">
+              <a:rPr sz="1150" b="0" i="0">
                 <a:solidFill>
                   <a:srgbClr val="1F4E79"/>
                 </a:solidFill>
@@ -12657,7 +12670,7 @@
         <p:spPr>
           <a:xfrm>
             <a:off x="502920" y="1481328"/>
-            <a:ext cx="5532120" cy="237744"/>
+            <a:ext cx="5532120" cy="256032"/>
           </a:xfrm>
           <a:prstGeom prst="rect">
             <a:avLst/>
@@ -12672,20 +12685,20 @@
           <a:p>
             <a:pPr algn="l">
               <a:lnSpc>
-                <a:spcPct val="112000"/>
+                <a:spcPct val="115000"/>
               </a:lnSpc>
               <a:spcAft>
                 <a:spcPts val="0"/>
               </a:spcAft>
             </a:pPr>
             <a:r>
-              <a:rPr sz="1200" b="1" i="0">
+              <a:rPr sz="1250" b="1" i="0">
                 <a:solidFill>
                   <a:srgbClr val="1A1A1A"/>
                 </a:solidFill>
                 <a:latin typeface="Calibri"/>
               </a:rPr>
-              <a:t>Data</a:t>
+              <a:t>Data we use</a:t>
             </a:r>
           </a:p>
         </p:txBody>
@@ -12699,8 +12712,8 @@
           <p:nvPr/>
         </p:nvGraphicFramePr>
         <p:xfrm>
-          <a:off x="502920" y="1773936"/>
-          <a:ext cx="5532120" cy="2542032"/>
+          <a:off x="502920" y="1792224"/>
+          <a:ext cx="5532120" cy="2633472"/>
         </p:xfrm>
         <a:graphic>
           <a:graphicData uri="http://schemas.openxmlformats.org/drawingml/2006/table">
@@ -12712,7 +12725,7 @@
                 <a:gridCol w="2514600"/>
                 <a:gridCol w="3017520"/>
               </a:tblGrid>
-              <a:tr h="274320">
+              <a:tr h="292608">
                 <a:tc>
                   <a:txBody>
                     <a:bodyPr wrap="square"/>
@@ -12720,11 +12733,11 @@
                     <a:p>
                       <a:pPr algn="l">
                         <a:lnSpc>
-                          <a:spcPct val="105000"/>
+                          <a:spcPct val="108000"/>
                         </a:lnSpc>
                       </a:pPr>
                       <a:r>
-                        <a:rPr sz="950" b="1">
+                        <a:rPr sz="1050" b="1">
                           <a:solidFill>
                             <a:srgbClr val="1A1A1A"/>
                           </a:solidFill>
@@ -12734,7 +12747,7 @@
                       </a:r>
                     </a:p>
                   </a:txBody>
-                  <a:tcPr marL="73152" marR="73152" marT="18288" marB="18288" anchor="ctr">
+                  <a:tcPr marL="73152" marR="73152" marT="27432" marB="27432" anchor="ctr">
                     <a:solidFill>
                       <a:srgbClr val="F0F0F0"/>
                     </a:solidFill>
@@ -12747,11 +12760,11 @@
                     <a:p>
                       <a:pPr algn="l">
                         <a:lnSpc>
-                          <a:spcPct val="105000"/>
+                          <a:spcPct val="108000"/>
                         </a:lnSpc>
                       </a:pPr>
                       <a:r>
-                        <a:rPr sz="950" b="1">
+                        <a:rPr sz="1050" b="1">
                           <a:solidFill>
                             <a:srgbClr val="1A1A1A"/>
                           </a:solidFill>
@@ -12761,14 +12774,14 @@
                       </a:r>
                     </a:p>
                   </a:txBody>
-                  <a:tcPr marL="73152" marR="73152" marT="18288" marB="18288" anchor="ctr">
+                  <a:tcPr marL="73152" marR="73152" marT="27432" marB="27432" anchor="ctr">
                     <a:solidFill>
                       <a:srgbClr val="F0F0F0"/>
                     </a:solidFill>
                   </a:tcPr>
                 </a:tc>
               </a:tr>
-              <a:tr h="566928">
+              <a:tr h="585216">
                 <a:tc>
                   <a:txBody>
                     <a:bodyPr wrap="square"/>
@@ -12776,11 +12789,11 @@
                     <a:p>
                       <a:pPr algn="l">
                         <a:lnSpc>
-                          <a:spcPct val="105000"/>
+                          <a:spcPct val="108000"/>
                         </a:lnSpc>
                       </a:pPr>
                       <a:r>
-                        <a:rPr sz="950" b="0">
+                        <a:rPr sz="1000" b="0">
                           <a:solidFill>
                             <a:srgbClr val="1A1A1A"/>
                           </a:solidFill>
@@ -12791,7 +12804,7 @@
                       </a:r>
                     </a:p>
                   </a:txBody>
-                  <a:tcPr marL="73152" marR="73152" marT="18288" marB="18288" anchor="ctr">
+                  <a:tcPr marL="73152" marR="73152" marT="27432" marB="27432" anchor="ctr">
                     <a:solidFill>
                       <a:srgbClr val="FFFFFF"/>
                     </a:solidFill>
@@ -12804,11 +12817,11 @@
                     <a:p>
                       <a:pPr algn="l">
                         <a:lnSpc>
-                          <a:spcPct val="105000"/>
+                          <a:spcPct val="108000"/>
                         </a:lnSpc>
                       </a:pPr>
                       <a:r>
-                        <a:rPr sz="950" b="0">
+                        <a:rPr sz="1000" b="0">
                           <a:solidFill>
                             <a:srgbClr val="1A1A1A"/>
                           </a:solidFill>
@@ -12818,14 +12831,14 @@
                       </a:r>
                     </a:p>
                   </a:txBody>
-                  <a:tcPr marL="73152" marR="73152" marT="18288" marB="18288" anchor="ctr">
+                  <a:tcPr marL="73152" marR="73152" marT="27432" marB="27432" anchor="ctr">
                     <a:solidFill>
                       <a:srgbClr val="FFFFFF"/>
                     </a:solidFill>
                   </a:tcPr>
                 </a:tc>
               </a:tr>
-              <a:tr h="566928">
+              <a:tr h="585216">
                 <a:tc>
                   <a:txBody>
                     <a:bodyPr wrap="square"/>
@@ -12833,11 +12846,11 @@
                     <a:p>
                       <a:pPr algn="l">
                         <a:lnSpc>
-                          <a:spcPct val="105000"/>
+                          <a:spcPct val="108000"/>
                         </a:lnSpc>
                       </a:pPr>
                       <a:r>
-                        <a:rPr sz="950" b="0">
+                        <a:rPr sz="1000" b="0">
                           <a:solidFill>
                             <a:srgbClr val="1A1A1A"/>
                           </a:solidFill>
@@ -12848,7 +12861,7 @@
                       </a:r>
                     </a:p>
                   </a:txBody>
-                  <a:tcPr marL="73152" marR="73152" marT="18288" marB="18288" anchor="ctr">
+                  <a:tcPr marL="73152" marR="73152" marT="27432" marB="27432" anchor="ctr">
                     <a:solidFill>
                       <a:srgbClr val="FFFFFF"/>
                     </a:solidFill>
@@ -12861,11 +12874,11 @@
                     <a:p>
                       <a:pPr algn="l">
                         <a:lnSpc>
-                          <a:spcPct val="105000"/>
+                          <a:spcPct val="108000"/>
                         </a:lnSpc>
                       </a:pPr>
                       <a:r>
-                        <a:rPr sz="950" b="0">
+                        <a:rPr sz="1000" b="0">
                           <a:solidFill>
                             <a:srgbClr val="1A1A1A"/>
                           </a:solidFill>
@@ -12875,14 +12888,14 @@
                       </a:r>
                     </a:p>
                   </a:txBody>
-                  <a:tcPr marL="73152" marR="73152" marT="18288" marB="18288" anchor="ctr">
+                  <a:tcPr marL="73152" marR="73152" marT="27432" marB="27432" anchor="ctr">
                     <a:solidFill>
                       <a:srgbClr val="FFFFFF"/>
                     </a:solidFill>
                   </a:tcPr>
                 </a:tc>
               </a:tr>
-              <a:tr h="566928">
+              <a:tr h="585216">
                 <a:tc>
                   <a:txBody>
                     <a:bodyPr wrap="square"/>
@@ -12890,11 +12903,11 @@
                     <a:p>
                       <a:pPr algn="l">
                         <a:lnSpc>
-                          <a:spcPct val="105000"/>
+                          <a:spcPct val="108000"/>
                         </a:lnSpc>
                       </a:pPr>
                       <a:r>
-                        <a:rPr sz="950" b="0">
+                        <a:rPr sz="1000" b="0">
                           <a:solidFill>
                             <a:srgbClr val="1A1A1A"/>
                           </a:solidFill>
@@ -12905,7 +12918,7 @@
                       </a:r>
                     </a:p>
                   </a:txBody>
-                  <a:tcPr marL="73152" marR="73152" marT="18288" marB="18288" anchor="ctr">
+                  <a:tcPr marL="73152" marR="73152" marT="27432" marB="27432" anchor="ctr">
                     <a:solidFill>
                       <a:srgbClr val="FFFFFF"/>
                     </a:solidFill>
@@ -12918,11 +12931,11 @@
                     <a:p>
                       <a:pPr algn="l">
                         <a:lnSpc>
-                          <a:spcPct val="105000"/>
+                          <a:spcPct val="108000"/>
                         </a:lnSpc>
                       </a:pPr>
                       <a:r>
-                        <a:rPr sz="950" b="0">
+                        <a:rPr sz="1000" b="0">
                           <a:solidFill>
                             <a:srgbClr val="1A1A1A"/>
                           </a:solidFill>
@@ -12932,14 +12945,14 @@
                       </a:r>
                     </a:p>
                   </a:txBody>
-                  <a:tcPr marL="73152" marR="73152" marT="18288" marB="18288" anchor="ctr">
+                  <a:tcPr marL="73152" marR="73152" marT="27432" marB="27432" anchor="ctr">
                     <a:solidFill>
                       <a:srgbClr val="FFFFFF"/>
                     </a:solidFill>
                   </a:tcPr>
                 </a:tc>
               </a:tr>
-              <a:tr h="566928">
+              <a:tr h="585216">
                 <a:tc>
                   <a:txBody>
                     <a:bodyPr wrap="square"/>
@@ -12947,11 +12960,11 @@
                     <a:p>
                       <a:pPr algn="l">
                         <a:lnSpc>
-                          <a:spcPct val="105000"/>
+                          <a:spcPct val="108000"/>
                         </a:lnSpc>
                       </a:pPr>
                       <a:r>
-                        <a:rPr sz="950" b="0">
+                        <a:rPr sz="1000" b="0">
                           <a:solidFill>
                             <a:srgbClr val="1A1A1A"/>
                           </a:solidFill>
@@ -12962,7 +12975,7 @@
                       </a:r>
                     </a:p>
                   </a:txBody>
-                  <a:tcPr marL="73152" marR="73152" marT="18288" marB="18288" anchor="ctr">
+                  <a:tcPr marL="73152" marR="73152" marT="27432" marB="27432" anchor="ctr">
                     <a:solidFill>
                       <a:srgbClr val="FFFFFF"/>
                     </a:solidFill>
@@ -12975,11 +12988,11 @@
                     <a:p>
                       <a:pPr algn="l">
                         <a:lnSpc>
-                          <a:spcPct val="105000"/>
+                          <a:spcPct val="108000"/>
                         </a:lnSpc>
                       </a:pPr>
                       <a:r>
-                        <a:rPr sz="950" b="0">
+                        <a:rPr sz="1000" b="0">
                           <a:solidFill>
                             <a:srgbClr val="1A1A1A"/>
                           </a:solidFill>
@@ -12989,7 +13002,7 @@
                       </a:r>
                     </a:p>
                   </a:txBody>
-                  <a:tcPr marL="73152" marR="73152" marT="18288" marB="18288" anchor="ctr">
+                  <a:tcPr marL="73152" marR="73152" marT="27432" marB="27432" anchor="ctr">
                     <a:solidFill>
                       <a:srgbClr val="FFFFFF"/>
                     </a:solidFill>
@@ -13009,7 +13022,7 @@
         <p:spPr>
           <a:xfrm>
             <a:off x="6355080" y="1481328"/>
-            <a:ext cx="5330952" cy="237744"/>
+            <a:ext cx="5330952" cy="256032"/>
           </a:xfrm>
           <a:prstGeom prst="rect">
             <a:avLst/>
@@ -13024,20 +13037,20 @@
           <a:p>
             <a:pPr algn="l">
               <a:lnSpc>
-                <a:spcPct val="112000"/>
+                <a:spcPct val="115000"/>
               </a:lnSpc>
               <a:spcAft>
                 <a:spcPts val="0"/>
               </a:spcAft>
             </a:pPr>
             <a:r>
-              <a:rPr sz="1200" b="1" i="0">
+              <a:rPr sz="1250" b="1" i="0">
                 <a:solidFill>
                   <a:srgbClr val="1A1A1A"/>
                 </a:solidFill>
                 <a:latin typeface="Calibri"/>
               </a:rPr>
-              <a:t>Policy and method</a:t>
+              <a:t>Policy and method we build on</a:t>
             </a:r>
           </a:p>
         </p:txBody>
@@ -13051,8 +13064,8 @@
           <p:nvPr/>
         </p:nvGraphicFramePr>
         <p:xfrm>
-          <a:off x="6355080" y="1773936"/>
-          <a:ext cx="5330952" cy="2286000"/>
+          <a:off x="6355080" y="1792224"/>
+          <a:ext cx="5330952" cy="2395728"/>
         </p:xfrm>
         <a:graphic>
           <a:graphicData uri="http://schemas.openxmlformats.org/drawingml/2006/table">
@@ -13064,7 +13077,7 @@
                 <a:gridCol w="2331720"/>
                 <a:gridCol w="2999232"/>
               </a:tblGrid>
-              <a:tr h="274320">
+              <a:tr h="292608">
                 <a:tc>
                   <a:txBody>
                     <a:bodyPr wrap="square"/>
@@ -13072,11 +13085,11 @@
                     <a:p>
                       <a:pPr algn="l">
                         <a:lnSpc>
-                          <a:spcPct val="105000"/>
+                          <a:spcPct val="108000"/>
                         </a:lnSpc>
                       </a:pPr>
                       <a:r>
-                        <a:rPr sz="950" b="1">
+                        <a:rPr sz="1050" b="1">
                           <a:solidFill>
                             <a:srgbClr val="1A1A1A"/>
                           </a:solidFill>
@@ -13086,7 +13099,7 @@
                       </a:r>
                     </a:p>
                   </a:txBody>
-                  <a:tcPr marL="73152" marR="73152" marT="18288" marB="18288" anchor="ctr">
+                  <a:tcPr marL="73152" marR="73152" marT="27432" marB="27432" anchor="ctr">
                     <a:solidFill>
                       <a:srgbClr val="F0F0F0"/>
                     </a:solidFill>
@@ -13099,11 +13112,11 @@
                     <a:p>
                       <a:pPr algn="l">
                         <a:lnSpc>
-                          <a:spcPct val="105000"/>
+                          <a:spcPct val="108000"/>
                         </a:lnSpc>
                       </a:pPr>
                       <a:r>
-                        <a:rPr sz="950" b="1">
+                        <a:rPr sz="1050" b="1">
                           <a:solidFill>
                             <a:srgbClr val="1A1A1A"/>
                           </a:solidFill>
@@ -13113,14 +13126,14 @@
                       </a:r>
                     </a:p>
                   </a:txBody>
-                  <a:tcPr marL="73152" marR="73152" marT="18288" marB="18288" anchor="ctr">
+                  <a:tcPr marL="73152" marR="73152" marT="27432" marB="27432" anchor="ctr">
                     <a:solidFill>
                       <a:srgbClr val="F0F0F0"/>
                     </a:solidFill>
                   </a:tcPr>
                 </a:tc>
               </a:tr>
-              <a:tr h="402336">
+              <a:tr h="420624">
                 <a:tc>
                   <a:txBody>
                     <a:bodyPr wrap="square"/>
@@ -13128,11 +13141,11 @@
                     <a:p>
                       <a:pPr algn="l">
                         <a:lnSpc>
-                          <a:spcPct val="105000"/>
+                          <a:spcPct val="108000"/>
                         </a:lnSpc>
                       </a:pPr>
                       <a:r>
-                        <a:rPr sz="950" b="0">
+                        <a:rPr sz="1000" b="0">
                           <a:solidFill>
                             <a:srgbClr val="1A1A1A"/>
                           </a:solidFill>
@@ -13142,7 +13155,7 @@
                       </a:r>
                     </a:p>
                   </a:txBody>
-                  <a:tcPr marL="73152" marR="73152" marT="18288" marB="18288" anchor="ctr">
+                  <a:tcPr marL="73152" marR="73152" marT="27432" marB="27432" anchor="ctr">
                     <a:solidFill>
                       <a:srgbClr val="FFFFFF"/>
                     </a:solidFill>
@@ -13155,28 +13168,28 @@
                     <a:p>
                       <a:pPr algn="l">
                         <a:lnSpc>
-                          <a:spcPct val="105000"/>
+                          <a:spcPct val="108000"/>
                         </a:lnSpc>
                       </a:pPr>
                       <a:r>
-                        <a:rPr sz="950" b="0">
+                        <a:rPr sz="1000" b="0">
                           <a:solidFill>
                             <a:srgbClr val="1A1A1A"/>
                           </a:solidFill>
                           <a:latin typeface="Calibri"/>
                         </a:rPr>
-                        <a:t>The connectivity priorities this is built against</a:t>
+                        <a:t>The connectivity priorities we build against</a:t>
                       </a:r>
                     </a:p>
                   </a:txBody>
-                  <a:tcPr marL="73152" marR="73152" marT="18288" marB="18288" anchor="ctr">
+                  <a:tcPr marL="73152" marR="73152" marT="27432" marB="27432" anchor="ctr">
                     <a:solidFill>
                       <a:srgbClr val="FFFFFF"/>
                     </a:solidFill>
                   </a:tcPr>
                 </a:tc>
               </a:tr>
-              <a:tr h="402336">
+              <a:tr h="420624">
                 <a:tc>
                   <a:txBody>
                     <a:bodyPr wrap="square"/>
@@ -13184,11 +13197,11 @@
                     <a:p>
                       <a:pPr algn="l">
                         <a:lnSpc>
-                          <a:spcPct val="105000"/>
+                          <a:spcPct val="108000"/>
                         </a:lnSpc>
                       </a:pPr>
                       <a:r>
-                        <a:rPr sz="950" b="0">
+                        <a:rPr sz="1000" b="0">
                           <a:solidFill>
                             <a:srgbClr val="1A1A1A"/>
                           </a:solidFill>
@@ -13198,7 +13211,7 @@
                       </a:r>
                     </a:p>
                   </a:txBody>
-                  <a:tcPr marL="73152" marR="73152" marT="18288" marB="18288" anchor="ctr">
+                  <a:tcPr marL="73152" marR="73152" marT="27432" marB="27432" anchor="ctr">
                     <a:solidFill>
                       <a:srgbClr val="FFFFFF"/>
                     </a:solidFill>
@@ -13211,11 +13224,11 @@
                     <a:p>
                       <a:pPr algn="l">
                         <a:lnSpc>
-                          <a:spcPct val="105000"/>
+                          <a:spcPct val="108000"/>
                         </a:lnSpc>
                       </a:pPr>
                       <a:r>
-                        <a:rPr sz="950" b="0">
+                        <a:rPr sz="1000" b="0">
                           <a:solidFill>
                             <a:srgbClr val="1A1A1A"/>
                           </a:solidFill>
@@ -13225,14 +13238,14 @@
                       </a:r>
                     </a:p>
                   </a:txBody>
-                  <a:tcPr marL="73152" marR="73152" marT="18288" marB="18288" anchor="ctr">
+                  <a:tcPr marL="73152" marR="73152" marT="27432" marB="27432" anchor="ctr">
                     <a:solidFill>
                       <a:srgbClr val="FFFFFF"/>
                     </a:solidFill>
                   </a:tcPr>
                 </a:tc>
               </a:tr>
-              <a:tr h="402336">
+              <a:tr h="420624">
                 <a:tc>
                   <a:txBody>
                     <a:bodyPr wrap="square"/>
@@ -13240,11 +13253,11 @@
                     <a:p>
                       <a:pPr algn="l">
                         <a:lnSpc>
-                          <a:spcPct val="105000"/>
+                          <a:spcPct val="108000"/>
                         </a:lnSpc>
                       </a:pPr>
                       <a:r>
-                        <a:rPr sz="950" b="0">
+                        <a:rPr sz="1000" b="0">
                           <a:solidFill>
                             <a:srgbClr val="1A1A1A"/>
                           </a:solidFill>
@@ -13254,7 +13267,7 @@
                       </a:r>
                     </a:p>
                   </a:txBody>
-                  <a:tcPr marL="73152" marR="73152" marT="18288" marB="18288" anchor="ctr">
+                  <a:tcPr marL="73152" marR="73152" marT="27432" marB="27432" anchor="ctr">
                     <a:solidFill>
                       <a:srgbClr val="FFFFFF"/>
                     </a:solidFill>
@@ -13267,28 +13280,28 @@
                     <a:p>
                       <a:pPr algn="l">
                         <a:lnSpc>
-                          <a:spcPct val="105000"/>
+                          <a:spcPct val="108000"/>
                         </a:lnSpc>
                       </a:pPr>
                       <a:r>
-                        <a:rPr sz="950" b="0">
+                        <a:rPr sz="1000" b="0">
                           <a:solidFill>
                             <a:srgbClr val="1A1A1A"/>
                           </a:solidFill>
                           <a:latin typeface="Calibri"/>
                         </a:rPr>
-                        <a:t>Shortest path — how the plan is found</a:t>
+                        <a:t>Shortest path - how we find the plan</a:t>
                       </a:r>
                     </a:p>
                   </a:txBody>
-                  <a:tcPr marL="73152" marR="73152" marT="18288" marB="18288" anchor="ctr">
+                  <a:tcPr marL="73152" marR="73152" marT="27432" marB="27432" anchor="ctr">
                     <a:solidFill>
                       <a:srgbClr val="FFFFFF"/>
                     </a:solidFill>
                   </a:tcPr>
                 </a:tc>
               </a:tr>
-              <a:tr h="402336">
+              <a:tr h="420624">
                 <a:tc>
                   <a:txBody>
                     <a:bodyPr wrap="square"/>
@@ -13296,11 +13309,11 @@
                     <a:p>
                       <a:pPr algn="l">
                         <a:lnSpc>
-                          <a:spcPct val="105000"/>
+                          <a:spcPct val="108000"/>
                         </a:lnSpc>
                       </a:pPr>
                       <a:r>
-                        <a:rPr sz="950" b="0">
+                        <a:rPr sz="1000" b="0">
                           <a:solidFill>
                             <a:srgbClr val="1A1A1A"/>
                           </a:solidFill>
@@ -13310,7 +13323,7 @@
                       </a:r>
                     </a:p>
                   </a:txBody>
-                  <a:tcPr marL="73152" marR="73152" marT="18288" marB="18288" anchor="ctr">
+                  <a:tcPr marL="73152" marR="73152" marT="27432" marB="27432" anchor="ctr">
                     <a:solidFill>
                       <a:srgbClr val="FFFFFF"/>
                     </a:solidFill>
@@ -13323,28 +13336,28 @@
                     <a:p>
                       <a:pPr algn="l">
                         <a:lnSpc>
-                          <a:spcPct val="105000"/>
+                          <a:spcPct val="108000"/>
                         </a:lnSpc>
                       </a:pPr>
                       <a:r>
-                        <a:rPr sz="950" b="0">
+                        <a:rPr sz="1000" b="0">
                           <a:solidFill>
                             <a:srgbClr val="1A1A1A"/>
                           </a:solidFill>
                           <a:latin typeface="Calibri"/>
                         </a:rPr>
-                        <a:t>k shortest loopless paths — how alternatives are found</a:t>
+                        <a:t>k shortest loopless paths - how we find alternatives</a:t>
                       </a:r>
                     </a:p>
                   </a:txBody>
-                  <a:tcPr marL="73152" marR="73152" marT="18288" marB="18288" anchor="ctr">
+                  <a:tcPr marL="73152" marR="73152" marT="27432" marB="27432" anchor="ctr">
                     <a:solidFill>
                       <a:srgbClr val="FFFFFF"/>
                     </a:solidFill>
                   </a:tcPr>
                 </a:tc>
               </a:tr>
-              <a:tr h="402336">
+              <a:tr h="420624">
                 <a:tc>
                   <a:txBody>
                     <a:bodyPr wrap="square"/>
@@ -13352,11 +13365,11 @@
                     <a:p>
                       <a:pPr algn="l">
                         <a:lnSpc>
-                          <a:spcPct val="105000"/>
+                          <a:spcPct val="108000"/>
                         </a:lnSpc>
                       </a:pPr>
                       <a:r>
-                        <a:rPr sz="950" b="0">
+                        <a:rPr sz="1000" b="0">
                           <a:solidFill>
                             <a:srgbClr val="1A1A1A"/>
                           </a:solidFill>
@@ -13366,7 +13379,7 @@
                       </a:r>
                     </a:p>
                   </a:txBody>
-                  <a:tcPr marL="73152" marR="73152" marT="18288" marB="18288" anchor="ctr">
+                  <a:tcPr marL="73152" marR="73152" marT="27432" marB="27432" anchor="ctr">
                     <a:solidFill>
                       <a:srgbClr val="FFFFFF"/>
                     </a:solidFill>
@@ -13379,21 +13392,21 @@
                     <a:p>
                       <a:pPr algn="l">
                         <a:lnSpc>
-                          <a:spcPct val="105000"/>
+                          <a:spcPct val="108000"/>
                         </a:lnSpc>
                       </a:pPr>
                       <a:r>
-                        <a:rPr sz="950" b="0">
+                        <a:rPr sz="1000" b="0">
                           <a:solidFill>
                             <a:srgbClr val="1A1A1A"/>
                           </a:solidFill>
                           <a:latin typeface="Calibri"/>
                         </a:rPr>
-                        <a:t>Planned infrastructure the model can be re-run against</a:t>
+                        <a:t>Planned infrastructure we can re-run the model against</a:t>
                       </a:r>
                     </a:p>
                   </a:txBody>
-                  <a:tcPr marL="73152" marR="73152" marT="18288" marB="18288" anchor="ctr">
+                  <a:tcPr marL="73152" marR="73152" marT="27432" marB="27432" anchor="ctr">
                     <a:solidFill>
                       <a:srgbClr val="FFFFFF"/>
                     </a:solidFill>
@@ -13412,7 +13425,7 @@
         </p:nvSpPr>
         <p:spPr>
           <a:xfrm>
-            <a:off x="502920" y="5257800"/>
+            <a:off x="502920" y="5349240"/>
             <a:ext cx="11183112" cy="566928"/>
           </a:xfrm>
           <a:prstGeom prst="rect">
@@ -13454,7 +13467,7 @@
         </p:nvSpPr>
         <p:spPr>
           <a:xfrm>
-            <a:off x="731520" y="5394960"/>
+            <a:off x="731520" y="5486400"/>
             <a:ext cx="10725912" cy="310896"/>
           </a:xfrm>
           <a:prstGeom prst="rect">
@@ -13470,7 +13483,7 @@
           <a:p>
             <a:pPr>
               <a:lnSpc>
-                <a:spcPct val="112000"/>
+                <a:spcPct val="115000"/>
               </a:lnSpc>
               <a:spcAft>
                 <a:spcPts val="0"/>
@@ -13479,11 +13492,11 @@
             <a:r>
               <a:rPr sz="1200" b="0">
                 <a:solidFill>
-                  <a:srgbClr val="5F5F5F"/>
+                  <a:srgbClr val="505050"/>
                 </a:solidFill>
                 <a:latin typeface="Calibri"/>
               </a:rPr>
-              <a:t>Code, tests and the full method notes:  </a:t>
+              <a:t>Code, tests and full method notes:  </a:t>
             </a:r>
             <a:r>
               <a:rPr sz="1200" b="1">
